--- a/docs/Tech_Hub_Apresentacao.pptx
+++ b/docs/Tech_Hub_Apresentacao.pptx
@@ -17,6 +17,8 @@
     <p:sldId id="265" r:id="rId16"/>
     <p:sldId id="266" r:id="rId17"/>
     <p:sldId id="267" r:id="rId18"/>
+    <p:sldId id="268" r:id="rId19"/>
+    <p:sldId id="269" r:id="rId20"/>
   </p:sldIdLst>
   <p:sldSz cx="12191695" cy="6858000" type="screen4x3"/>
   <p:notesSz cx="6858000" cy="9144000"/>
@@ -3504,7 +3506,7 @@
             <a:avLst/>
           </a:prstGeom>
           <a:solidFill>
-            <a:srgbClr val="FFC107"/>
+            <a:srgbClr val="E04F5F"/>
           </a:solidFill>
           <a:ln>
             <a:noFill/>
@@ -3558,11 +3560,11 @@
             <a:r>
               <a:rPr sz="1100" b="1" i="0">
                 <a:solidFill>
-                  <a:srgbClr val="FFC107"/>
-                </a:solidFill>
-                <a:latin typeface="Segoe UI"/>
-              </a:rPr>
-              <a:t>4 · DIFICULDADES</a:t>
+                  <a:srgbClr val="E04F5F"/>
+                </a:solidFill>
+                <a:latin typeface="Segoe UI"/>
+              </a:rPr>
+              <a:t>QUALIDADE &amp; SEGURANÇA</a:t>
             </a:r>
           </a:p>
           <a:p>
@@ -3573,7 +3575,7 @@
                 </a:solidFill>
                 <a:latin typeface="Segoe UI"/>
               </a:rPr>
-              <a:t>O que foi difícil e o que aprendemos</a:t>
+              <a:t>Validações, testes e proteção</a:t>
             </a:r>
           </a:p>
         </p:txBody>
@@ -3608,7 +3610,7 @@
                 </a:solidFill>
                 <a:latin typeface="Segoe UI"/>
               </a:rPr>
-              <a:t>1–2 min</a:t>
+              <a:t>RNF + Etapa 6</a:t>
             </a:r>
           </a:p>
         </p:txBody>
@@ -3622,7 +3624,7 @@
         <p:spPr>
           <a:xfrm>
             <a:off x="548640" y="2011680"/>
-            <a:ext cx="5440680" cy="4023360"/>
+            <a:ext cx="3566160" cy="4023360"/>
           </a:xfrm>
           <a:prstGeom prst="roundRect">
             <a:avLst/>
@@ -3668,13 +3670,13 @@
         <p:spPr>
           <a:xfrm>
             <a:off x="548640" y="2011680"/>
-            <a:ext cx="5440680" cy="82296"/>
+            <a:ext cx="3566160" cy="82296"/>
           </a:xfrm>
           <a:prstGeom prst="rect">
             <a:avLst/>
           </a:prstGeom>
           <a:solidFill>
-            <a:srgbClr val="E04F5F"/>
+            <a:srgbClr val="3AF6FF"/>
           </a:solidFill>
           <a:ln>
             <a:noFill/>
@@ -3712,7 +3714,7 @@
         <p:spPr>
           <a:xfrm>
             <a:off x="749808" y="2194560"/>
-            <a:ext cx="5038344" cy="3694176"/>
+            <a:ext cx="3163824" cy="3694176"/>
           </a:xfrm>
           <a:prstGeom prst="rect">
             <a:avLst/>
@@ -3731,13 +3733,13 @@
               </a:spcAft>
             </a:pPr>
             <a:r>
-              <a:rPr sz="1800" b="1" i="0">
+              <a:rPr sz="1500" b="1" i="0">
                 <a:solidFill>
                   <a:srgbClr val="EEF7FF"/>
                 </a:solidFill>
                 <a:latin typeface="Segoe UI"/>
               </a:rPr>
-              <a:t>Desafios</a:t>
+              <a:t>Validações de regra</a:t>
             </a:r>
           </a:p>
           <a:p>
@@ -3750,22 +3752,22 @@
               </a:spcAft>
             </a:pPr>
             <a:r>
-              <a:rPr sz="1350" b="0" i="0">
-                <a:solidFill>
-                  <a:srgbClr val="E04F5F"/>
+              <a:rPr sz="1250" b="0" i="0">
+                <a:solidFill>
+                  <a:srgbClr val="3AF6FF"/>
                 </a:solidFill>
                 <a:latin typeface="Segoe UI"/>
               </a:rPr>
               <a:t>• </a:t>
             </a:r>
             <a:r>
-              <a:rPr sz="1350" b="0" i="0">
+              <a:rPr sz="1250" b="0" i="0">
                 <a:solidFill>
                   <a:srgbClr val="9BB1CA"/>
                 </a:solidFill>
                 <a:latin typeface="Segoe UI"/>
               </a:rPr>
-              <a:t>Modelar a negociação de troca por turnos</a:t>
+              <a:t>CPF e CNPJ com dígito verificador</a:t>
             </a:r>
           </a:p>
           <a:p>
@@ -3778,22 +3780,22 @@
               </a:spcAft>
             </a:pPr>
             <a:r>
-              <a:rPr sz="1350" b="0" i="0">
-                <a:solidFill>
-                  <a:srgbClr val="E04F5F"/>
+              <a:rPr sz="1250" b="0" i="0">
+                <a:solidFill>
+                  <a:srgbClr val="3AF6FF"/>
                 </a:solidFill>
                 <a:latin typeface="Segoe UI"/>
               </a:rPr>
               <a:t>• </a:t>
             </a:r>
             <a:r>
-              <a:rPr sz="1350" b="0" i="0">
+              <a:rPr sz="1250" b="0" i="0">
                 <a:solidFill>
                   <a:srgbClr val="9BB1CA"/>
                 </a:solidFill>
                 <a:latin typeface="Segoe UI"/>
               </a:rPr>
-              <a:t>Garantir que os dois lados confirmem a entrega</a:t>
+              <a:t>Documentos únicos no cadastro</a:t>
             </a:r>
           </a:p>
           <a:p>
@@ -3806,22 +3808,22 @@
               </a:spcAft>
             </a:pPr>
             <a:r>
-              <a:rPr sz="1350" b="0" i="0">
-                <a:solidFill>
-                  <a:srgbClr val="E04F5F"/>
+              <a:rPr sz="1250" b="0" i="0">
+                <a:solidFill>
+                  <a:srgbClr val="3AF6FF"/>
                 </a:solidFill>
                 <a:latin typeface="Segoe UI"/>
               </a:rPr>
               <a:t>• </a:t>
             </a:r>
             <a:r>
-              <a:rPr sz="1350" b="0" i="0">
+              <a:rPr sz="1250" b="0" i="0">
                 <a:solidFill>
                   <a:srgbClr val="9BB1CA"/>
                 </a:solidFill>
                 <a:latin typeface="Segoe UI"/>
               </a:rPr>
-              <a:t>Integrar pagamento e tratar o webhook</a:t>
+              <a:t>Maioridade (18+) na pessoa física</a:t>
             </a:r>
           </a:p>
           <a:p>
@@ -3834,22 +3836,22 @@
               </a:spcAft>
             </a:pPr>
             <a:r>
-              <a:rPr sz="1350" b="0" i="0">
-                <a:solidFill>
-                  <a:srgbClr val="E04F5F"/>
+              <a:rPr sz="1250" b="0" i="0">
+                <a:solidFill>
+                  <a:srgbClr val="3AF6FF"/>
                 </a:solidFill>
                 <a:latin typeface="Segoe UI"/>
               </a:rPr>
               <a:t>• </a:t>
             </a:r>
             <a:r>
-              <a:rPr sz="1350" b="0" i="0">
+              <a:rPr sz="1250" b="0" i="0">
                 <a:solidFill>
                   <a:srgbClr val="9BB1CA"/>
                 </a:solidFill>
                 <a:latin typeface="Segoe UI"/>
               </a:rPr>
-              <a:t>Validar CPF/CNPJ e aplicar máscaras</a:t>
+              <a:t>Loja não cria troca / só produto novo</a:t>
             </a:r>
           </a:p>
           <a:p>
@@ -3862,22 +3864,50 @@
               </a:spcAft>
             </a:pPr>
             <a:r>
-              <a:rPr sz="1350" b="0" i="0">
-                <a:solidFill>
-                  <a:srgbClr val="E04F5F"/>
+              <a:rPr sz="1250" b="0" i="0">
+                <a:solidFill>
+                  <a:srgbClr val="3AF6FF"/>
                 </a:solidFill>
                 <a:latin typeface="Segoe UI"/>
               </a:rPr>
               <a:t>• </a:t>
             </a:r>
             <a:r>
-              <a:rPr sz="1350" b="0" i="0">
+              <a:rPr sz="1250" b="0" i="0">
                 <a:solidFill>
                   <a:srgbClr val="9BB1CA"/>
                 </a:solidFill>
                 <a:latin typeface="Segoe UI"/>
               </a:rPr>
-              <a:t>Manter o visual consistente em todas as telas</a:t>
+              <a:t>Não adicionar o próprio anúncio ao carrinho</a:t>
+            </a:r>
+          </a:p>
+          <a:p>
+            <a:pPr>
+              <a:lnSpc>
+                <a:spcPct val="104000"/>
+              </a:lnSpc>
+              <a:spcAft>
+                <a:spcPts val="400"/>
+              </a:spcAft>
+            </a:pPr>
+            <a:r>
+              <a:rPr sz="1250" b="0" i="0">
+                <a:solidFill>
+                  <a:srgbClr val="3AF6FF"/>
+                </a:solidFill>
+                <a:latin typeface="Segoe UI"/>
+              </a:rPr>
+              <a:t>• </a:t>
+            </a:r>
+            <a:r>
+              <a:rPr sz="1250" b="0" i="0">
+                <a:solidFill>
+                  <a:srgbClr val="9BB1CA"/>
+                </a:solidFill>
+                <a:latin typeface="Segoe UI"/>
+              </a:rPr>
+              <a:t>Máscaras de CPF, telefone, CEP e R$</a:t>
             </a:r>
           </a:p>
         </p:txBody>
@@ -3890,8 +3920,8 @@
         </p:nvSpPr>
         <p:spPr>
           <a:xfrm>
-            <a:off x="6199632" y="2011680"/>
-            <a:ext cx="5440680" cy="4023360"/>
+            <a:off x="4315968" y="2011680"/>
+            <a:ext cx="3566160" cy="4023360"/>
           </a:xfrm>
           <a:prstGeom prst="roundRect">
             <a:avLst/>
@@ -3936,8 +3966,8 @@
         </p:nvSpPr>
         <p:spPr>
           <a:xfrm>
-            <a:off x="6199632" y="2011680"/>
-            <a:ext cx="5440680" cy="82296"/>
+            <a:off x="4315968" y="2011680"/>
+            <a:ext cx="3566160" cy="82296"/>
           </a:xfrm>
           <a:prstGeom prst="rect">
             <a:avLst/>
@@ -3980,8 +4010,8 @@
         </p:nvSpPr>
         <p:spPr>
           <a:xfrm>
-            <a:off x="6400800" y="2194560"/>
-            <a:ext cx="5038344" cy="3694176"/>
+            <a:off x="4517136" y="2194560"/>
+            <a:ext cx="3163824" cy="3694176"/>
           </a:xfrm>
           <a:prstGeom prst="rect">
             <a:avLst/>
@@ -4000,13 +4030,13 @@
               </a:spcAft>
             </a:pPr>
             <a:r>
-              <a:rPr sz="1800" b="1" i="0">
+              <a:rPr sz="1500" b="1" i="0">
                 <a:solidFill>
                   <a:srgbClr val="EEF7FF"/>
                 </a:solidFill>
                 <a:latin typeface="Segoe UI"/>
               </a:rPr>
-              <a:t>Aprendizados</a:t>
+              <a:t>Testes automatizados</a:t>
             </a:r>
           </a:p>
           <a:p>
@@ -4019,7 +4049,7 @@
               </a:spcAft>
             </a:pPr>
             <a:r>
-              <a:rPr sz="1350" b="0" i="0">
+              <a:rPr sz="1250" b="0" i="0">
                 <a:solidFill>
                   <a:srgbClr val="00FF88"/>
                 </a:solidFill>
@@ -4028,13 +4058,13 @@
               <a:t>• </a:t>
             </a:r>
             <a:r>
-              <a:rPr sz="1350" b="0" i="0">
+              <a:rPr sz="1250" b="0" i="0">
                 <a:solidFill>
                   <a:srgbClr val="9BB1CA"/>
                 </a:solidFill>
                 <a:latin typeface="Segoe UI"/>
               </a:rPr>
-              <a:t>Modelagem de dados orienta todo o resto</a:t>
+              <a:t>Cadastro de PF e PJ</a:t>
             </a:r>
           </a:p>
           <a:p>
@@ -4047,7 +4077,7 @@
               </a:spcAft>
             </a:pPr>
             <a:r>
-              <a:rPr sz="1350" b="0" i="0">
+              <a:rPr sz="1250" b="0" i="0">
                 <a:solidFill>
                   <a:srgbClr val="00FF88"/>
                 </a:solidFill>
@@ -4056,13 +4086,13 @@
               <a:t>• </a:t>
             </a:r>
             <a:r>
-              <a:rPr sz="1350" b="0" i="0">
+              <a:rPr sz="1250" b="0" i="0">
                 <a:solidFill>
                   <a:srgbClr val="9BB1CA"/>
                 </a:solidFill>
                 <a:latin typeface="Segoe UI"/>
               </a:rPr>
-              <a:t>Separar a lógica em domínios facilita o trabalho em grupo</a:t>
+              <a:t>Fluxo de checkout e pedidos</a:t>
             </a:r>
           </a:p>
           <a:p>
@@ -4075,7 +4105,7 @@
               </a:spcAft>
             </a:pPr>
             <a:r>
-              <a:rPr sz="1350" b="0" i="0">
+              <a:rPr sz="1250" b="0" i="0">
                 <a:solidFill>
                   <a:srgbClr val="00FF88"/>
                 </a:solidFill>
@@ -4084,13 +4114,13 @@
               <a:t>• </a:t>
             </a:r>
             <a:r>
-              <a:rPr sz="1350" b="0" i="0">
+              <a:rPr sz="1250" b="0" i="0">
                 <a:solidFill>
                   <a:srgbClr val="9BB1CA"/>
                 </a:solidFill>
                 <a:latin typeface="Segoe UI"/>
               </a:rPr>
-              <a:t>Testes dão segurança para mexer no código</a:t>
+              <a:t>Fluxo completo de troca</a:t>
             </a:r>
           </a:p>
           <a:p>
@@ -4103,7 +4133,7 @@
               </a:spcAft>
             </a:pPr>
             <a:r>
-              <a:rPr sz="1350" b="0" i="0">
+              <a:rPr sz="1250" b="0" i="0">
                 <a:solidFill>
                   <a:srgbClr val="00FF88"/>
                 </a:solidFill>
@@ -4112,13 +4142,13 @@
               <a:t>• </a:t>
             </a:r>
             <a:r>
-              <a:rPr sz="1350" b="0" i="0">
+              <a:rPr sz="1250" b="0" i="0">
                 <a:solidFill>
                   <a:srgbClr val="9BB1CA"/>
                 </a:solidFill>
                 <a:latin typeface="Segoe UI"/>
               </a:rPr>
-              <a:t>Validar no backend, não só no frontend</a:t>
+              <a:t>Entrega e histórico</a:t>
             </a:r>
           </a:p>
           <a:p>
@@ -4131,7 +4161,7 @@
               </a:spcAft>
             </a:pPr>
             <a:r>
-              <a:rPr sz="1350" b="0" i="0">
+              <a:rPr sz="1250" b="0" i="0">
                 <a:solidFill>
                   <a:srgbClr val="00FF88"/>
                 </a:solidFill>
@@ -4140,20 +4170,345 @@
               <a:t>• </a:t>
             </a:r>
             <a:r>
-              <a:rPr sz="1350" b="0" i="0">
+              <a:rPr sz="1250" b="0" i="0">
                 <a:solidFill>
                   <a:srgbClr val="9BB1CA"/>
                 </a:solidFill>
                 <a:latin typeface="Segoe UI"/>
               </a:rPr>
-              <a:t>Git com commits frequentes salva o projeto</a:t>
-            </a:r>
-          </a:p>
-        </p:txBody>
-      </p:sp>
-      <p:sp>
-        <p:nvSpPr>
-          <p:cNvPr id="13" name="TextBox 12"/>
+              <a:t>Webhooks de pagamento</a:t>
+            </a:r>
+          </a:p>
+          <a:p>
+            <a:pPr>
+              <a:lnSpc>
+                <a:spcPct val="104000"/>
+              </a:lnSpc>
+              <a:spcAft>
+                <a:spcPts val="400"/>
+              </a:spcAft>
+            </a:pPr>
+            <a:r>
+              <a:rPr sz="1250" b="0" i="0">
+                <a:solidFill>
+                  <a:srgbClr val="00FF88"/>
+                </a:solidFill>
+                <a:latin typeface="Segoe UI"/>
+              </a:rPr>
+              <a:t>• </a:t>
+            </a:r>
+            <a:r>
+              <a:rPr sz="1250" b="0" i="0">
+                <a:solidFill>
+                  <a:srgbClr val="9BB1CA"/>
+                </a:solidFill>
+                <a:latin typeface="Segoe UI"/>
+              </a:rPr>
+              <a:t>Auth e regras dos models</a:t>
+            </a:r>
+          </a:p>
+        </p:txBody>
+      </p:sp>
+      <p:sp>
+        <p:nvSpPr>
+          <p:cNvPr id="13" name="Rounded Rectangle 12"/>
+          <p:cNvSpPr/>
+          <p:nvPr/>
+        </p:nvSpPr>
+        <p:spPr>
+          <a:xfrm>
+            <a:off x="8083296" y="2011680"/>
+            <a:ext cx="3566160" cy="4023360"/>
+          </a:xfrm>
+          <a:prstGeom prst="roundRect">
+            <a:avLst/>
+          </a:prstGeom>
+          <a:solidFill>
+            <a:srgbClr val="081D3D"/>
+          </a:solidFill>
+          <a:ln w="12700">
+            <a:solidFill>
+              <a:srgbClr val="1E3A5F"/>
+            </a:solidFill>
+          </a:ln>
+          <a:effectLst/>
+        </p:spPr>
+        <p:style>
+          <a:lnRef idx="1">
+            <a:schemeClr val="accent1"/>
+          </a:lnRef>
+          <a:fillRef idx="3">
+            <a:schemeClr val="accent1"/>
+          </a:fillRef>
+          <a:effectRef idx="2">
+            <a:schemeClr val="accent1"/>
+          </a:effectRef>
+          <a:fontRef idx="minor">
+            <a:schemeClr val="lt1"/>
+          </a:fontRef>
+        </p:style>
+        <p:txBody>
+          <a:bodyPr rtlCol="0" anchor="ctr"/>
+          <a:lstStyle/>
+          <a:p>
+            <a:pPr algn="ctr"/>
+          </a:p>
+        </p:txBody>
+      </p:sp>
+      <p:sp>
+        <p:nvSpPr>
+          <p:cNvPr id="14" name="Rectangle 13"/>
+          <p:cNvSpPr/>
+          <p:nvPr/>
+        </p:nvSpPr>
+        <p:spPr>
+          <a:xfrm>
+            <a:off x="8083296" y="2011680"/>
+            <a:ext cx="3566160" cy="82296"/>
+          </a:xfrm>
+          <a:prstGeom prst="rect">
+            <a:avLst/>
+          </a:prstGeom>
+          <a:solidFill>
+            <a:srgbClr val="FFC107"/>
+          </a:solidFill>
+          <a:ln>
+            <a:noFill/>
+          </a:ln>
+          <a:effectLst/>
+        </p:spPr>
+        <p:style>
+          <a:lnRef idx="1">
+            <a:schemeClr val="accent1"/>
+          </a:lnRef>
+          <a:fillRef idx="3">
+            <a:schemeClr val="accent1"/>
+          </a:fillRef>
+          <a:effectRef idx="2">
+            <a:schemeClr val="accent1"/>
+          </a:effectRef>
+          <a:fontRef idx="minor">
+            <a:schemeClr val="lt1"/>
+          </a:fontRef>
+        </p:style>
+        <p:txBody>
+          <a:bodyPr rtlCol="0" anchor="ctr"/>
+          <a:lstStyle/>
+          <a:p>
+            <a:pPr algn="ctr"/>
+          </a:p>
+        </p:txBody>
+      </p:sp>
+      <p:sp>
+        <p:nvSpPr>
+          <p:cNvPr id="15" name="TextBox 14"/>
+          <p:cNvSpPr txBox="1"/>
+          <p:nvPr/>
+        </p:nvSpPr>
+        <p:spPr>
+          <a:xfrm>
+            <a:off x="8284464" y="2194560"/>
+            <a:ext cx="3163824" cy="3694176"/>
+          </a:xfrm>
+          <a:prstGeom prst="rect">
+            <a:avLst/>
+          </a:prstGeom>
+          <a:noFill/>
+        </p:spPr>
+        <p:txBody>
+          <a:bodyPr wrap="square" anchor="t" lIns="73152" rIns="73152" tIns="36576" bIns="36576">
+            <a:spAutoFit/>
+          </a:bodyPr>
+          <a:lstStyle/>
+          <a:p>
+            <a:pPr>
+              <a:spcAft>
+                <a:spcPts val="700"/>
+              </a:spcAft>
+            </a:pPr>
+            <a:r>
+              <a:rPr sz="1500" b="1" i="0">
+                <a:solidFill>
+                  <a:srgbClr val="EEF7FF"/>
+                </a:solidFill>
+                <a:latin typeface="Segoe UI"/>
+              </a:rPr>
+              <a:t>Segurança</a:t>
+            </a:r>
+          </a:p>
+          <a:p>
+            <a:pPr>
+              <a:lnSpc>
+                <a:spcPct val="104000"/>
+              </a:lnSpc>
+              <a:spcAft>
+                <a:spcPts val="400"/>
+              </a:spcAft>
+            </a:pPr>
+            <a:r>
+              <a:rPr sz="1250" b="0" i="0">
+                <a:solidFill>
+                  <a:srgbClr val="FFC107"/>
+                </a:solidFill>
+                <a:latin typeface="Segoe UI"/>
+              </a:rPr>
+              <a:t>• </a:t>
+            </a:r>
+            <a:r>
+              <a:rPr sz="1250" b="0" i="0">
+                <a:solidFill>
+                  <a:srgbClr val="9BB1CA"/>
+                </a:solidFill>
+                <a:latin typeface="Segoe UI"/>
+              </a:rPr>
+              <a:t>Senhas com hash + validação de força</a:t>
+            </a:r>
+          </a:p>
+          <a:p>
+            <a:pPr>
+              <a:lnSpc>
+                <a:spcPct val="104000"/>
+              </a:lnSpc>
+              <a:spcAft>
+                <a:spcPts val="400"/>
+              </a:spcAft>
+            </a:pPr>
+            <a:r>
+              <a:rPr sz="1250" b="0" i="0">
+                <a:solidFill>
+                  <a:srgbClr val="FFC107"/>
+                </a:solidFill>
+                <a:latin typeface="Segoe UI"/>
+              </a:rPr>
+              <a:t>• </a:t>
+            </a:r>
+            <a:r>
+              <a:rPr sz="1250" b="0" i="0">
+                <a:solidFill>
+                  <a:srgbClr val="9BB1CA"/>
+                </a:solidFill>
+                <a:latin typeface="Segoe UI"/>
+              </a:rPr>
+              <a:t>Segredos fora do código (.env)</a:t>
+            </a:r>
+          </a:p>
+          <a:p>
+            <a:pPr>
+              <a:lnSpc>
+                <a:spcPct val="104000"/>
+              </a:lnSpc>
+              <a:spcAft>
+                <a:spcPts val="400"/>
+              </a:spcAft>
+            </a:pPr>
+            <a:r>
+              <a:rPr sz="1250" b="0" i="0">
+                <a:solidFill>
+                  <a:srgbClr val="FFC107"/>
+                </a:solidFill>
+                <a:latin typeface="Segoe UI"/>
+              </a:rPr>
+              <a:t>• </a:t>
+            </a:r>
+            <a:r>
+              <a:rPr sz="1250" b="0" i="0">
+                <a:solidFill>
+                  <a:srgbClr val="9BB1CA"/>
+                </a:solidFill>
+                <a:latin typeface="Segoe UI"/>
+              </a:rPr>
+              <a:t>CSRF em todos os formulários; ORM (anti-SQLi)</a:t>
+            </a:r>
+          </a:p>
+          <a:p>
+            <a:pPr>
+              <a:lnSpc>
+                <a:spcPct val="104000"/>
+              </a:lnSpc>
+              <a:spcAft>
+                <a:spcPts val="400"/>
+              </a:spcAft>
+            </a:pPr>
+            <a:r>
+              <a:rPr sz="1250" b="0" i="0">
+                <a:solidFill>
+                  <a:srgbClr val="FFC107"/>
+                </a:solidFill>
+                <a:latin typeface="Segoe UI"/>
+              </a:rPr>
+              <a:t>• </a:t>
+            </a:r>
+            <a:r>
+              <a:rPr sz="1250" b="0" i="0">
+                <a:solidFill>
+                  <a:srgbClr val="9BB1CA"/>
+                </a:solidFill>
+                <a:latin typeface="Segoe UI"/>
+              </a:rPr>
+              <a:t>Cookies seguros + SSL/HSTS em produção</a:t>
+            </a:r>
+          </a:p>
+          <a:p>
+            <a:pPr>
+              <a:lnSpc>
+                <a:spcPct val="104000"/>
+              </a:lnSpc>
+              <a:spcAft>
+                <a:spcPts val="400"/>
+              </a:spcAft>
+            </a:pPr>
+            <a:r>
+              <a:rPr sz="1250" b="0" i="0">
+                <a:solidFill>
+                  <a:srgbClr val="FFC107"/>
+                </a:solidFill>
+                <a:latin typeface="Segoe UI"/>
+              </a:rPr>
+              <a:t>• </a:t>
+            </a:r>
+            <a:r>
+              <a:rPr sz="1250" b="0" i="0">
+                <a:solidFill>
+                  <a:srgbClr val="9BB1CA"/>
+                </a:solidFill>
+                <a:latin typeface="Segoe UI"/>
+              </a:rPr>
+              <a:t>Moderação de conteúdo + strikes + rate limit</a:t>
+            </a:r>
+          </a:p>
+          <a:p>
+            <a:pPr>
+              <a:lnSpc>
+                <a:spcPct val="104000"/>
+              </a:lnSpc>
+              <a:spcAft>
+                <a:spcPts val="400"/>
+              </a:spcAft>
+            </a:pPr>
+            <a:r>
+              <a:rPr sz="1250" b="0" i="0">
+                <a:solidFill>
+                  <a:srgbClr val="FFC107"/>
+                </a:solidFill>
+                <a:latin typeface="Segoe UI"/>
+              </a:rPr>
+              <a:t>• </a:t>
+            </a:r>
+            <a:r>
+              <a:rPr sz="1250" b="0" i="0">
+                <a:solidFill>
+                  <a:srgbClr val="9BB1CA"/>
+                </a:solidFill>
+                <a:latin typeface="Segoe UI"/>
+              </a:rPr>
+              <a:t>Permissões por dono (evita IDOR)</a:t>
+            </a:r>
+          </a:p>
+        </p:txBody>
+      </p:sp>
+      <p:sp>
+        <p:nvSpPr>
+          <p:cNvPr id="16" name="TextBox 15"/>
           <p:cNvSpPr txBox="1"/>
           <p:nvPr/>
         </p:nvSpPr>
@@ -4196,7 +4551,7 @@
       </p:sp>
       <p:sp>
         <p:nvSpPr>
-          <p:cNvPr id="14" name="TextBox 13"/>
+          <p:cNvPr id="17" name="TextBox 16"/>
           <p:cNvSpPr txBox="1"/>
           <p:nvPr/>
         </p:nvSpPr>
@@ -4366,417 +4721,6 @@
             <a:avLst/>
           </a:prstGeom>
           <a:solidFill>
-            <a:srgbClr val="3AF6FF"/>
-          </a:solidFill>
-          <a:ln>
-            <a:noFill/>
-          </a:ln>
-          <a:effectLst/>
-        </p:spPr>
-        <p:style>
-          <a:lnRef idx="1">
-            <a:schemeClr val="accent1"/>
-          </a:lnRef>
-          <a:fillRef idx="3">
-            <a:schemeClr val="accent1"/>
-          </a:fillRef>
-          <a:effectRef idx="2">
-            <a:schemeClr val="accent1"/>
-          </a:effectRef>
-          <a:fontRef idx="minor">
-            <a:schemeClr val="lt1"/>
-          </a:fontRef>
-        </p:style>
-        <p:txBody>
-          <a:bodyPr rtlCol="0" anchor="ctr"/>
-          <a:lstStyle/>
-          <a:p>
-            <a:pPr algn="ctr"/>
-          </a:p>
-        </p:txBody>
-      </p:sp>
-      <p:sp>
-        <p:nvSpPr>
-          <p:cNvPr id="5" name="TextBox 4"/>
-          <p:cNvSpPr txBox="1"/>
-          <p:nvPr/>
-        </p:nvSpPr>
-        <p:spPr>
-          <a:xfrm>
-            <a:off x="868680" y="749808"/>
-            <a:ext cx="8686800" cy="914400"/>
-          </a:xfrm>
-          <a:prstGeom prst="rect">
-            <a:avLst/>
-          </a:prstGeom>
-          <a:noFill/>
-        </p:spPr>
-        <p:txBody>
-          <a:bodyPr wrap="square" anchor="ctr" lIns="73152" rIns="73152" tIns="36576" bIns="36576">
-            <a:spAutoFit/>
-          </a:bodyPr>
-          <a:lstStyle/>
-          <a:p>
-            <a:r>
-              <a:rPr sz="1100" b="1" i="0">
-                <a:solidFill>
-                  <a:srgbClr val="3AF6FF"/>
-                </a:solidFill>
-                <a:latin typeface="Segoe UI"/>
-              </a:rPr>
-              <a:t>ROADMAP</a:t>
-            </a:r>
-          </a:p>
-          <a:p>
-            <a:r>
-              <a:rPr sz="2500" b="1" i="0">
-                <a:solidFill>
-                  <a:srgbClr val="EEF7FF"/>
-                </a:solidFill>
-                <a:latin typeface="Segoe UI"/>
-              </a:rPr>
-              <a:t>Próximos passos</a:t>
-            </a:r>
-          </a:p>
-        </p:txBody>
-      </p:sp>
-      <p:sp>
-        <p:nvSpPr>
-          <p:cNvPr id="6" name="TextBox 5"/>
-          <p:cNvSpPr txBox="1"/>
-          <p:nvPr/>
-        </p:nvSpPr>
-        <p:spPr>
-          <a:xfrm>
-            <a:off x="8869680" y="749808"/>
-            <a:ext cx="2651760" cy="914400"/>
-          </a:xfrm>
-          <a:prstGeom prst="rect">
-            <a:avLst/>
-          </a:prstGeom>
-          <a:noFill/>
-        </p:spPr>
-        <p:txBody>
-          <a:bodyPr wrap="square" anchor="ctr" lIns="73152" rIns="73152" tIns="36576" bIns="36576">
-            <a:spAutoFit/>
-          </a:bodyPr>
-          <a:lstStyle/>
-          <a:p>
-            <a:pPr algn="r"/>
-            <a:r>
-              <a:rPr sz="1100" b="0" i="0">
-                <a:solidFill>
-                  <a:srgbClr val="9BB1CA"/>
-                </a:solidFill>
-                <a:latin typeface="Segoe UI"/>
-              </a:rPr>
-              <a:t>Etapa 7 · Deploy</a:t>
-            </a:r>
-          </a:p>
-        </p:txBody>
-      </p:sp>
-      <p:sp>
-        <p:nvSpPr>
-          <p:cNvPr id="7" name="Rounded Rectangle 6"/>
-          <p:cNvSpPr/>
-          <p:nvPr/>
-        </p:nvSpPr>
-        <p:spPr>
-          <a:xfrm>
-            <a:off x="548640" y="2011680"/>
-            <a:ext cx="3566160" cy="4023360"/>
-          </a:xfrm>
-          <a:prstGeom prst="roundRect">
-            <a:avLst/>
-          </a:prstGeom>
-          <a:solidFill>
-            <a:srgbClr val="081D3D"/>
-          </a:solidFill>
-          <a:ln w="12700">
-            <a:solidFill>
-              <a:srgbClr val="1E3A5F"/>
-            </a:solidFill>
-          </a:ln>
-          <a:effectLst/>
-        </p:spPr>
-        <p:style>
-          <a:lnRef idx="1">
-            <a:schemeClr val="accent1"/>
-          </a:lnRef>
-          <a:fillRef idx="3">
-            <a:schemeClr val="accent1"/>
-          </a:fillRef>
-          <a:effectRef idx="2">
-            <a:schemeClr val="accent1"/>
-          </a:effectRef>
-          <a:fontRef idx="minor">
-            <a:schemeClr val="lt1"/>
-          </a:fontRef>
-        </p:style>
-        <p:txBody>
-          <a:bodyPr rtlCol="0" anchor="ctr"/>
-          <a:lstStyle/>
-          <a:p>
-            <a:pPr algn="ctr"/>
-          </a:p>
-        </p:txBody>
-      </p:sp>
-      <p:sp>
-        <p:nvSpPr>
-          <p:cNvPr id="8" name="Rectangle 7"/>
-          <p:cNvSpPr/>
-          <p:nvPr/>
-        </p:nvSpPr>
-        <p:spPr>
-          <a:xfrm>
-            <a:off x="548640" y="2011680"/>
-            <a:ext cx="3566160" cy="82296"/>
-          </a:xfrm>
-          <a:prstGeom prst="rect">
-            <a:avLst/>
-          </a:prstGeom>
-          <a:solidFill>
-            <a:srgbClr val="FFC107"/>
-          </a:solidFill>
-          <a:ln>
-            <a:noFill/>
-          </a:ln>
-          <a:effectLst/>
-        </p:spPr>
-        <p:style>
-          <a:lnRef idx="1">
-            <a:schemeClr val="accent1"/>
-          </a:lnRef>
-          <a:fillRef idx="3">
-            <a:schemeClr val="accent1"/>
-          </a:fillRef>
-          <a:effectRef idx="2">
-            <a:schemeClr val="accent1"/>
-          </a:effectRef>
-          <a:fontRef idx="minor">
-            <a:schemeClr val="lt1"/>
-          </a:fontRef>
-        </p:style>
-        <p:txBody>
-          <a:bodyPr rtlCol="0" anchor="ctr"/>
-          <a:lstStyle/>
-          <a:p>
-            <a:pPr algn="ctr"/>
-          </a:p>
-        </p:txBody>
-      </p:sp>
-      <p:sp>
-        <p:nvSpPr>
-          <p:cNvPr id="9" name="TextBox 8"/>
-          <p:cNvSpPr txBox="1"/>
-          <p:nvPr/>
-        </p:nvSpPr>
-        <p:spPr>
-          <a:xfrm>
-            <a:off x="749808" y="2194560"/>
-            <a:ext cx="3163824" cy="3694176"/>
-          </a:xfrm>
-          <a:prstGeom prst="rect">
-            <a:avLst/>
-          </a:prstGeom>
-          <a:noFill/>
-        </p:spPr>
-        <p:txBody>
-          <a:bodyPr wrap="square" anchor="t" lIns="73152" rIns="73152" tIns="36576" bIns="36576">
-            <a:spAutoFit/>
-          </a:bodyPr>
-          <a:lstStyle/>
-          <a:p>
-            <a:pPr>
-              <a:spcAft>
-                <a:spcPts val="700"/>
-              </a:spcAft>
-            </a:pPr>
-            <a:r>
-              <a:rPr sz="1500" b="1" i="0">
-                <a:solidFill>
-                  <a:srgbClr val="EEF7FF"/>
-                </a:solidFill>
-                <a:latin typeface="Segoe UI"/>
-              </a:rPr>
-              <a:t>Em andamento</a:t>
-            </a:r>
-          </a:p>
-          <a:p>
-            <a:pPr>
-              <a:lnSpc>
-                <a:spcPct val="104000"/>
-              </a:lnSpc>
-              <a:spcAft>
-                <a:spcPts val="400"/>
-              </a:spcAft>
-            </a:pPr>
-            <a:r>
-              <a:rPr sz="1300" b="0" i="0">
-                <a:solidFill>
-                  <a:srgbClr val="FFC107"/>
-                </a:solidFill>
-                <a:latin typeface="Segoe UI"/>
-              </a:rPr>
-              <a:t>• </a:t>
-            </a:r>
-            <a:r>
-              <a:rPr sz="1300" b="0" i="0">
-                <a:solidFill>
-                  <a:srgbClr val="9BB1CA"/>
-                </a:solidFill>
-                <a:latin typeface="Segoe UI"/>
-              </a:rPr>
-              <a:t>Deploy em produção (Railway / Render)</a:t>
-            </a:r>
-          </a:p>
-          <a:p>
-            <a:pPr>
-              <a:lnSpc>
-                <a:spcPct val="104000"/>
-              </a:lnSpc>
-              <a:spcAft>
-                <a:spcPts val="400"/>
-              </a:spcAft>
-            </a:pPr>
-            <a:r>
-              <a:rPr sz="1300" b="0" i="0">
-                <a:solidFill>
-                  <a:srgbClr val="FFC107"/>
-                </a:solidFill>
-                <a:latin typeface="Segoe UI"/>
-              </a:rPr>
-              <a:t>• </a:t>
-            </a:r>
-            <a:r>
-              <a:rPr sz="1300" b="0" i="0">
-                <a:solidFill>
-                  <a:srgbClr val="9BB1CA"/>
-                </a:solidFill>
-                <a:latin typeface="Segoe UI"/>
-              </a:rPr>
-              <a:t>collectstatic + Postgres gerenciado</a:t>
-            </a:r>
-          </a:p>
-          <a:p>
-            <a:pPr>
-              <a:lnSpc>
-                <a:spcPct val="104000"/>
-              </a:lnSpc>
-              <a:spcAft>
-                <a:spcPts val="400"/>
-              </a:spcAft>
-            </a:pPr>
-            <a:r>
-              <a:rPr sz="1300" b="0" i="0">
-                <a:solidFill>
-                  <a:srgbClr val="FFC107"/>
-                </a:solidFill>
-                <a:latin typeface="Segoe UI"/>
-              </a:rPr>
-              <a:t>• </a:t>
-            </a:r>
-            <a:r>
-              <a:rPr sz="1300" b="0" i="0">
-                <a:solidFill>
-                  <a:srgbClr val="9BB1CA"/>
-                </a:solidFill>
-                <a:latin typeface="Segoe UI"/>
-              </a:rPr>
-              <a:t>Variáveis de ambiente no servidor</a:t>
-            </a:r>
-          </a:p>
-          <a:p>
-            <a:pPr>
-              <a:lnSpc>
-                <a:spcPct val="104000"/>
-              </a:lnSpc>
-              <a:spcAft>
-                <a:spcPts val="400"/>
-              </a:spcAft>
-            </a:pPr>
-            <a:r>
-              <a:rPr sz="1300" b="0" i="0">
-                <a:solidFill>
-                  <a:srgbClr val="FFC107"/>
-                </a:solidFill>
-                <a:latin typeface="Segoe UI"/>
-              </a:rPr>
-              <a:t>• </a:t>
-            </a:r>
-            <a:r>
-              <a:rPr sz="1300" b="0" i="0">
-                <a:solidFill>
-                  <a:srgbClr val="9BB1CA"/>
-                </a:solidFill>
-                <a:latin typeface="Segoe UI"/>
-              </a:rPr>
-              <a:t>Domínio e HTTPS</a:t>
-            </a:r>
-          </a:p>
-        </p:txBody>
-      </p:sp>
-      <p:sp>
-        <p:nvSpPr>
-          <p:cNvPr id="10" name="Rounded Rectangle 9"/>
-          <p:cNvSpPr/>
-          <p:nvPr/>
-        </p:nvSpPr>
-        <p:spPr>
-          <a:xfrm>
-            <a:off x="4315968" y="2011680"/>
-            <a:ext cx="3566160" cy="4023360"/>
-          </a:xfrm>
-          <a:prstGeom prst="roundRect">
-            <a:avLst/>
-          </a:prstGeom>
-          <a:solidFill>
-            <a:srgbClr val="081D3D"/>
-          </a:solidFill>
-          <a:ln w="12700">
-            <a:solidFill>
-              <a:srgbClr val="1E3A5F"/>
-            </a:solidFill>
-          </a:ln>
-          <a:effectLst/>
-        </p:spPr>
-        <p:style>
-          <a:lnRef idx="1">
-            <a:schemeClr val="accent1"/>
-          </a:lnRef>
-          <a:fillRef idx="3">
-            <a:schemeClr val="accent1"/>
-          </a:fillRef>
-          <a:effectRef idx="2">
-            <a:schemeClr val="accent1"/>
-          </a:effectRef>
-          <a:fontRef idx="minor">
-            <a:schemeClr val="lt1"/>
-          </a:fontRef>
-        </p:style>
-        <p:txBody>
-          <a:bodyPr rtlCol="0" anchor="ctr"/>
-          <a:lstStyle/>
-          <a:p>
-            <a:pPr algn="ctr"/>
-          </a:p>
-        </p:txBody>
-      </p:sp>
-      <p:sp>
-        <p:nvSpPr>
-          <p:cNvPr id="11" name="Rectangle 10"/>
-          <p:cNvSpPr/>
-          <p:nvPr/>
-        </p:nvSpPr>
-        <p:spPr>
-          <a:xfrm>
-            <a:off x="4315968" y="2011680"/>
-            <a:ext cx="3566160" cy="82296"/>
-          </a:xfrm>
-          <a:prstGeom prst="rect">
-            <a:avLst/>
-          </a:prstGeom>
-          <a:solidFill>
             <a:srgbClr val="0FA7FF"/>
           </a:solidFill>
           <a:ln>
@@ -4808,14 +4752,94 @@
       </p:sp>
       <p:sp>
         <p:nvSpPr>
-          <p:cNvPr id="12" name="TextBox 11"/>
+          <p:cNvPr id="5" name="TextBox 4"/>
           <p:cNvSpPr txBox="1"/>
           <p:nvPr/>
         </p:nvSpPr>
         <p:spPr>
           <a:xfrm>
-            <a:off x="4517136" y="2194560"/>
-            <a:ext cx="3163824" cy="3694176"/>
+            <a:off x="868680" y="749808"/>
+            <a:ext cx="8686800" cy="914400"/>
+          </a:xfrm>
+          <a:prstGeom prst="rect">
+            <a:avLst/>
+          </a:prstGeom>
+          <a:noFill/>
+        </p:spPr>
+        <p:txBody>
+          <a:bodyPr wrap="square" anchor="ctr" lIns="73152" rIns="73152" tIns="36576" bIns="36576">
+            <a:spAutoFit/>
+          </a:bodyPr>
+          <a:lstStyle/>
+          <a:p>
+            <a:r>
+              <a:rPr sz="1100" b="1" i="0">
+                <a:solidFill>
+                  <a:srgbClr val="0FA7FF"/>
+                </a:solidFill>
+                <a:latin typeface="Segoe UI"/>
+              </a:rPr>
+              <a:t>3 · DECISÕES TÉCNICAS</a:t>
+            </a:r>
+          </a:p>
+          <a:p>
+            <a:r>
+              <a:rPr sz="2500" b="1" i="0">
+                <a:solidFill>
+                  <a:srgbClr val="EEF7FF"/>
+                </a:solidFill>
+                <a:latin typeface="Segoe UI"/>
+              </a:rPr>
+              <a:t>Por que fizemos assim</a:t>
+            </a:r>
+          </a:p>
+        </p:txBody>
+      </p:sp>
+      <p:sp>
+        <p:nvSpPr>
+          <p:cNvPr id="6" name="TextBox 5"/>
+          <p:cNvSpPr txBox="1"/>
+          <p:nvPr/>
+        </p:nvSpPr>
+        <p:spPr>
+          <a:xfrm>
+            <a:off x="8869680" y="749808"/>
+            <a:ext cx="2651760" cy="914400"/>
+          </a:xfrm>
+          <a:prstGeom prst="rect">
+            <a:avLst/>
+          </a:prstGeom>
+          <a:noFill/>
+        </p:spPr>
+        <p:txBody>
+          <a:bodyPr wrap="square" anchor="ctr" lIns="73152" rIns="73152" tIns="36576" bIns="36576">
+            <a:spAutoFit/>
+          </a:bodyPr>
+          <a:lstStyle/>
+          <a:p>
+            <a:pPr algn="r"/>
+            <a:r>
+              <a:rPr sz="1100" b="0" i="0">
+                <a:solidFill>
+                  <a:srgbClr val="9BB1CA"/>
+                </a:solidFill>
+                <a:latin typeface="Segoe UI"/>
+              </a:rPr>
+              <a:t>2–3 min</a:t>
+            </a:r>
+          </a:p>
+        </p:txBody>
+      </p:sp>
+      <p:sp>
+        <p:nvSpPr>
+          <p:cNvPr id="7" name="TextBox 6"/>
+          <p:cNvSpPr txBox="1"/>
+          <p:nvPr/>
+        </p:nvSpPr>
+        <p:spPr>
+          <a:xfrm>
+            <a:off x="640080" y="2057400"/>
+            <a:ext cx="10972800" cy="4114800"/>
           </a:xfrm>
           <a:prstGeom prst="rect">
             <a:avLst/>
@@ -4829,378 +4853,231 @@
           <a:lstStyle/>
           <a:p>
             <a:pPr>
-              <a:spcAft>
-                <a:spcPts val="700"/>
-              </a:spcAft>
-            </a:pPr>
-            <a:r>
-              <a:rPr sz="1500" b="1" i="0">
+              <a:lnSpc>
+                <a:spcPct val="105000"/>
+              </a:lnSpc>
+              <a:spcAft>
+                <a:spcPts val="1100"/>
+              </a:spcAft>
+            </a:pPr>
+            <a:r>
+              <a:rPr sz="1450" b="1" i="0">
+                <a:solidFill>
+                  <a:srgbClr val="3AF6FF"/>
+                </a:solidFill>
+                <a:latin typeface="Segoe UI"/>
+              </a:rPr>
+              <a:t>▸  </a:t>
+            </a:r>
+            <a:r>
+              <a:rPr sz="1450" b="1" i="0">
                 <a:solidFill>
                   <a:srgbClr val="EEF7FF"/>
                 </a:solidFill>
                 <a:latin typeface="Segoe UI"/>
               </a:rPr>
-              <a:t>Melhorias planejadas</a:t>
+              <a:t>User customizado desde o início</a:t>
+            </a:r>
+            <a:r>
+              <a:rPr sz="1450" b="0" i="0">
+                <a:solidFill>
+                  <a:srgbClr val="9BB1CA"/>
+                </a:solidFill>
+                <a:latin typeface="Segoe UI"/>
+              </a:rPr>
+              <a:t>  —  AbstractUser com is_store evita migração dolorosa depois e unifica PF/PJ num só login.</a:t>
             </a:r>
           </a:p>
           <a:p>
             <a:pPr>
               <a:lnSpc>
-                <a:spcPct val="104000"/>
+                <a:spcPct val="105000"/>
               </a:lnSpc>
               <a:spcAft>
-                <a:spcPts val="400"/>
-              </a:spcAft>
-            </a:pPr>
-            <a:r>
-              <a:rPr sz="1300" b="0" i="0">
-                <a:solidFill>
-                  <a:srgbClr val="0FA7FF"/>
-                </a:solidFill>
-                <a:latin typeface="Segoe UI"/>
-              </a:rPr>
-              <a:t>• </a:t>
-            </a:r>
-            <a:r>
-              <a:rPr sz="1300" b="0" i="0">
+                <a:spcPts val="1100"/>
+              </a:spcAft>
+            </a:pPr>
+            <a:r>
+              <a:rPr sz="1450" b="1" i="0">
+                <a:solidFill>
+                  <a:srgbClr val="3AF6FF"/>
+                </a:solidFill>
+                <a:latin typeface="Segoe UI"/>
+              </a:rPr>
+              <a:t>▸  </a:t>
+            </a:r>
+            <a:r>
+              <a:rPr sz="1450" b="1" i="0">
+                <a:solidFill>
+                  <a:srgbClr val="EEF7FF"/>
+                </a:solidFill>
+                <a:latin typeface="Segoe UI"/>
+              </a:rPr>
+              <a:t>Perfis separados (Common/Store)</a:t>
+            </a:r>
+            <a:r>
+              <a:rPr sz="1450" b="0" i="0">
                 <a:solidFill>
                   <a:srgbClr val="9BB1CA"/>
                 </a:solidFill>
                 <a:latin typeface="Segoe UI"/>
               </a:rPr>
-              <a:t>Avaliações de vendedor (RF06)</a:t>
+              <a:t>  —  cada tipo tem campos e validações próprios sem poluir o User com dezenas de colunas opcionais.</a:t>
             </a:r>
           </a:p>
           <a:p>
             <a:pPr>
               <a:lnSpc>
-                <a:spcPct val="104000"/>
+                <a:spcPct val="105000"/>
               </a:lnSpc>
               <a:spcAft>
-                <a:spcPts val="400"/>
-              </a:spcAft>
-            </a:pPr>
-            <a:r>
-              <a:rPr sz="1300" b="0" i="0">
-                <a:solidFill>
-                  <a:srgbClr val="0FA7FF"/>
-                </a:solidFill>
-                <a:latin typeface="Segoe UI"/>
-              </a:rPr>
-              <a:t>• </a:t>
-            </a:r>
-            <a:r>
-              <a:rPr sz="1300" b="0" i="0">
+                <a:spcPts val="1100"/>
+              </a:spcAft>
+            </a:pPr>
+            <a:r>
+              <a:rPr sz="1450" b="1" i="0">
+                <a:solidFill>
+                  <a:srgbClr val="3AF6FF"/>
+                </a:solidFill>
+                <a:latin typeface="Segoe UI"/>
+              </a:rPr>
+              <a:t>▸  </a:t>
+            </a:r>
+            <a:r>
+              <a:rPr sz="1450" b="1" i="0">
+                <a:solidFill>
+                  <a:srgbClr val="EEF7FF"/>
+                </a:solidFill>
+                <a:latin typeface="Segoe UI"/>
+              </a:rPr>
+              <a:t>Lógica em domains/ e não nas views</a:t>
+            </a:r>
+            <a:r>
+              <a:rPr sz="1450" b="0" i="0">
                 <a:solidFill>
                   <a:srgbClr val="9BB1CA"/>
                 </a:solidFill>
                 <a:latin typeface="Segoe UI"/>
               </a:rPr>
-              <a:t>Chat em tempo real (WebSockets)</a:t>
+              <a:t>  —  views finas que delegam para módulos de domínio — mais fácil de ler, testar e dividir entre o grupo.</a:t>
             </a:r>
           </a:p>
           <a:p>
             <a:pPr>
               <a:lnSpc>
-                <a:spcPct val="104000"/>
+                <a:spcPct val="105000"/>
               </a:lnSpc>
               <a:spcAft>
-                <a:spcPts val="400"/>
-              </a:spcAft>
-            </a:pPr>
-            <a:r>
-              <a:rPr sz="1300" b="0" i="0">
-                <a:solidFill>
-                  <a:srgbClr val="0FA7FF"/>
-                </a:solidFill>
-                <a:latin typeface="Segoe UI"/>
-              </a:rPr>
-              <a:t>• </a:t>
-            </a:r>
-            <a:r>
-              <a:rPr sz="1300" b="0" i="0">
+                <a:spcPts val="1100"/>
+              </a:spcAft>
+            </a:pPr>
+            <a:r>
+              <a:rPr sz="1450" b="1" i="0">
+                <a:solidFill>
+                  <a:srgbClr val="3AF6FF"/>
+                </a:solidFill>
+                <a:latin typeface="Segoe UI"/>
+              </a:rPr>
+              <a:t>▸  </a:t>
+            </a:r>
+            <a:r>
+              <a:rPr sz="1450" b="1" i="0">
+                <a:solidFill>
+                  <a:srgbClr val="EEF7FF"/>
+                </a:solidFill>
+                <a:latin typeface="Segoe UI"/>
+              </a:rPr>
+              <a:t>Snapshots em OrderItem</a:t>
+            </a:r>
+            <a:r>
+              <a:rPr sz="1450" b="0" i="0">
                 <a:solidFill>
                   <a:srgbClr val="9BB1CA"/>
                 </a:solidFill>
                 <a:latin typeface="Segoe UI"/>
               </a:rPr>
-              <a:t>Imagens em cloud storage</a:t>
+              <a:t>  —  título e preço são copiados no pedido; o histórico não muda se o anúncio for editado depois.</a:t>
             </a:r>
           </a:p>
           <a:p>
             <a:pPr>
               <a:lnSpc>
-                <a:spcPct val="104000"/>
+                <a:spcPct val="105000"/>
               </a:lnSpc>
               <a:spcAft>
-                <a:spcPts val="400"/>
-              </a:spcAft>
-            </a:pPr>
-            <a:r>
-              <a:rPr sz="1300" b="0" i="0">
-                <a:solidFill>
-                  <a:srgbClr val="0FA7FF"/>
-                </a:solidFill>
-                <a:latin typeface="Segoe UI"/>
-              </a:rPr>
-              <a:t>• </a:t>
-            </a:r>
-            <a:r>
-              <a:rPr sz="1300" b="0" i="0">
+                <a:spcPts val="1100"/>
+              </a:spcAft>
+            </a:pPr>
+            <a:r>
+              <a:rPr sz="1450" b="1" i="0">
+                <a:solidFill>
+                  <a:srgbClr val="3AF6FF"/>
+                </a:solidFill>
+                <a:latin typeface="Segoe UI"/>
+              </a:rPr>
+              <a:t>▸  </a:t>
+            </a:r>
+            <a:r>
+              <a:rPr sz="1450" b="1" i="0">
+                <a:solidFill>
+                  <a:srgbClr val="EEF7FF"/>
+                </a:solidFill>
+                <a:latin typeface="Segoe UI"/>
+              </a:rPr>
+              <a:t>Troca como entidades próprias</a:t>
+            </a:r>
+            <a:r>
+              <a:rPr sz="1450" b="0" i="0">
                 <a:solidFill>
                   <a:srgbClr val="9BB1CA"/>
                 </a:solidFill>
                 <a:latin typeface="Segoe UI"/>
               </a:rPr>
-              <a:t>Notificações de negociação</a:t>
-            </a:r>
-          </a:p>
-        </p:txBody>
-      </p:sp>
-      <p:sp>
-        <p:nvSpPr>
-          <p:cNvPr id="13" name="Rounded Rectangle 12"/>
-          <p:cNvSpPr/>
-          <p:nvPr/>
-        </p:nvSpPr>
-        <p:spPr>
-          <a:xfrm>
-            <a:off x="8083296" y="2011680"/>
-            <a:ext cx="3566160" cy="4023360"/>
-          </a:xfrm>
-          <a:prstGeom prst="roundRect">
-            <a:avLst/>
-          </a:prstGeom>
-          <a:solidFill>
-            <a:srgbClr val="081D3D"/>
-          </a:solidFill>
-          <a:ln w="12700">
-            <a:solidFill>
-              <a:srgbClr val="1E3A5F"/>
-            </a:solidFill>
-          </a:ln>
-          <a:effectLst/>
-        </p:spPr>
-        <p:style>
-          <a:lnRef idx="1">
-            <a:schemeClr val="accent1"/>
-          </a:lnRef>
-          <a:fillRef idx="3">
-            <a:schemeClr val="accent1"/>
-          </a:fillRef>
-          <a:effectRef idx="2">
-            <a:schemeClr val="accent1"/>
-          </a:effectRef>
-          <a:fontRef idx="minor">
-            <a:schemeClr val="lt1"/>
-          </a:fontRef>
-        </p:style>
-        <p:txBody>
-          <a:bodyPr rtlCol="0" anchor="ctr"/>
-          <a:lstStyle/>
-          <a:p>
-            <a:pPr algn="ctr"/>
-          </a:p>
-        </p:txBody>
-      </p:sp>
-      <p:sp>
-        <p:nvSpPr>
-          <p:cNvPr id="14" name="Rectangle 13"/>
-          <p:cNvSpPr/>
-          <p:nvPr/>
-        </p:nvSpPr>
-        <p:spPr>
-          <a:xfrm>
-            <a:off x="8083296" y="2011680"/>
-            <a:ext cx="3566160" cy="82296"/>
-          </a:xfrm>
-          <a:prstGeom prst="rect">
-            <a:avLst/>
-          </a:prstGeom>
-          <a:solidFill>
-            <a:srgbClr val="00FF88"/>
-          </a:solidFill>
-          <a:ln>
-            <a:noFill/>
-          </a:ln>
-          <a:effectLst/>
-        </p:spPr>
-        <p:style>
-          <a:lnRef idx="1">
-            <a:schemeClr val="accent1"/>
-          </a:lnRef>
-          <a:fillRef idx="3">
-            <a:schemeClr val="accent1"/>
-          </a:fillRef>
-          <a:effectRef idx="2">
-            <a:schemeClr val="accent1"/>
-          </a:effectRef>
-          <a:fontRef idx="minor">
-            <a:schemeClr val="lt1"/>
-          </a:fontRef>
-        </p:style>
-        <p:txBody>
-          <a:bodyPr rtlCol="0" anchor="ctr"/>
-          <a:lstStyle/>
-          <a:p>
-            <a:pPr algn="ctr"/>
-          </a:p>
-        </p:txBody>
-      </p:sp>
-      <p:sp>
-        <p:nvSpPr>
-          <p:cNvPr id="15" name="TextBox 14"/>
-          <p:cNvSpPr txBox="1"/>
-          <p:nvPr/>
-        </p:nvSpPr>
-        <p:spPr>
-          <a:xfrm>
-            <a:off x="8284464" y="2194560"/>
-            <a:ext cx="3163824" cy="3694176"/>
-          </a:xfrm>
-          <a:prstGeom prst="rect">
-            <a:avLst/>
-          </a:prstGeom>
-          <a:noFill/>
-        </p:spPr>
-        <p:txBody>
-          <a:bodyPr wrap="square" anchor="t" lIns="73152" rIns="73152" tIns="36576" bIns="36576">
-            <a:spAutoFit/>
-          </a:bodyPr>
-          <a:lstStyle/>
-          <a:p>
-            <a:pPr>
-              <a:spcAft>
-                <a:spcPts val="700"/>
-              </a:spcAft>
-            </a:pPr>
-            <a:r>
-              <a:rPr sz="1500" b="1" i="0">
+              <a:t>  —  TradeRequest/Proposal/Fulfillment modelam a negociação real, em vez de forçar tudo no chat.</a:t>
+            </a:r>
+          </a:p>
+          <a:p>
+            <a:pPr>
+              <a:lnSpc>
+                <a:spcPct val="105000"/>
+              </a:lnSpc>
+              <a:spcAft>
+                <a:spcPts val="1100"/>
+              </a:spcAft>
+            </a:pPr>
+            <a:r>
+              <a:rPr sz="1450" b="1" i="0">
+                <a:solidFill>
+                  <a:srgbClr val="3AF6FF"/>
+                </a:solidFill>
+                <a:latin typeface="Segoe UI"/>
+              </a:rPr>
+              <a:t>▸  </a:t>
+            </a:r>
+            <a:r>
+              <a:rPr sz="1450" b="1" i="0">
                 <a:solidFill>
                   <a:srgbClr val="EEF7FF"/>
                 </a:solidFill>
                 <a:latin typeface="Segoe UI"/>
               </a:rPr>
-              <a:t>Polimento</a:t>
-            </a:r>
-          </a:p>
-          <a:p>
-            <a:pPr>
-              <a:lnSpc>
-                <a:spcPct val="104000"/>
-              </a:lnSpc>
-              <a:spcAft>
-                <a:spcPts val="400"/>
-              </a:spcAft>
-            </a:pPr>
-            <a:r>
-              <a:rPr sz="1300" b="0" i="0">
-                <a:solidFill>
-                  <a:srgbClr val="00FF88"/>
-                </a:solidFill>
-                <a:latin typeface="Segoe UI"/>
-              </a:rPr>
-              <a:t>• </a:t>
-            </a:r>
-            <a:r>
-              <a:rPr sz="1300" b="0" i="0">
+              <a:t>Pagamento via gateway + webhook</a:t>
+            </a:r>
+            <a:r>
+              <a:rPr sz="1450" b="0" i="0">
                 <a:solidFill>
                   <a:srgbClr val="9BB1CA"/>
                 </a:solidFill>
                 <a:latin typeface="Segoe UI"/>
               </a:rPr>
-              <a:t>Refino de responsividade mobile</a:t>
-            </a:r>
-          </a:p>
-          <a:p>
-            <a:pPr>
-              <a:lnSpc>
-                <a:spcPct val="104000"/>
-              </a:lnSpc>
-              <a:spcAft>
-                <a:spcPts val="400"/>
-              </a:spcAft>
-            </a:pPr>
-            <a:r>
-              <a:rPr sz="1300" b="0" i="0">
-                <a:solidFill>
-                  <a:srgbClr val="00FF88"/>
-                </a:solidFill>
-                <a:latin typeface="Segoe UI"/>
-              </a:rPr>
-              <a:t>• </a:t>
-            </a:r>
-            <a:r>
-              <a:rPr sz="1300" b="0" i="0">
-                <a:solidFill>
-                  <a:srgbClr val="9BB1CA"/>
-                </a:solidFill>
-                <a:latin typeface="Segoe UI"/>
-              </a:rPr>
-              <a:t>Mais cobertura de testes</a:t>
-            </a:r>
-          </a:p>
-          <a:p>
-            <a:pPr>
-              <a:lnSpc>
-                <a:spcPct val="104000"/>
-              </a:lnSpc>
-              <a:spcAft>
-                <a:spcPts val="400"/>
-              </a:spcAft>
-            </a:pPr>
-            <a:r>
-              <a:rPr sz="1300" b="0" i="0">
-                <a:solidFill>
-                  <a:srgbClr val="00FF88"/>
-                </a:solidFill>
-                <a:latin typeface="Segoe UI"/>
-              </a:rPr>
-              <a:t>• </a:t>
-            </a:r>
-            <a:r>
-              <a:rPr sz="1300" b="0" i="0">
-                <a:solidFill>
-                  <a:srgbClr val="9BB1CA"/>
-                </a:solidFill>
-                <a:latin typeface="Segoe UI"/>
-              </a:rPr>
-              <a:t>Painel admin de moderação</a:t>
-            </a:r>
-          </a:p>
-          <a:p>
-            <a:pPr>
-              <a:lnSpc>
-                <a:spcPct val="104000"/>
-              </a:lnSpc>
-              <a:spcAft>
-                <a:spcPts val="400"/>
-              </a:spcAft>
-            </a:pPr>
-            <a:r>
-              <a:rPr sz="1300" b="0" i="0">
-                <a:solidFill>
-                  <a:srgbClr val="00FF88"/>
-                </a:solidFill>
-                <a:latin typeface="Segoe UI"/>
-              </a:rPr>
-              <a:t>• </a:t>
-            </a:r>
-            <a:r>
-              <a:rPr sz="1300" b="0" i="0">
-                <a:solidFill>
-                  <a:srgbClr val="9BB1CA"/>
-                </a:solidFill>
-                <a:latin typeface="Segoe UI"/>
-              </a:rPr>
-              <a:t>Acessibilidade</a:t>
-            </a:r>
-          </a:p>
-        </p:txBody>
-      </p:sp>
-      <p:sp>
-        <p:nvSpPr>
-          <p:cNvPr id="16" name="TextBox 15"/>
+              <a:t>  —  o Mercado Pago confirma o pagamento de forma assíncrona, refletindo no status do pedido.</a:t>
+            </a:r>
+          </a:p>
+        </p:txBody>
+      </p:sp>
+      <p:sp>
+        <p:nvSpPr>
+          <p:cNvPr id="8" name="TextBox 7"/>
           <p:cNvSpPr txBox="1"/>
           <p:nvPr/>
         </p:nvSpPr>
@@ -5243,7 +5120,7 @@
       </p:sp>
       <p:sp>
         <p:nvSpPr>
-          <p:cNvPr id="17" name="TextBox 16"/>
+          <p:cNvPr id="9" name="TextBox 8"/>
           <p:cNvSpPr txBox="1"/>
           <p:nvPr/>
         </p:nvSpPr>
@@ -5310,50 +5187,6 @@
         </p:nvSpPr>
         <p:spPr>
           <a:xfrm>
-            <a:off x="8869680" y="2743200"/>
-            <a:ext cx="4572000" cy="4572000"/>
-          </a:xfrm>
-          <a:prstGeom prst="rect">
-            <a:avLst/>
-          </a:prstGeom>
-          <a:solidFill>
-            <a:srgbClr val="081D3D"/>
-          </a:solidFill>
-          <a:ln>
-            <a:noFill/>
-          </a:ln>
-          <a:effectLst/>
-        </p:spPr>
-        <p:style>
-          <a:lnRef idx="1">
-            <a:schemeClr val="accent1"/>
-          </a:lnRef>
-          <a:fillRef idx="3">
-            <a:schemeClr val="accent1"/>
-          </a:fillRef>
-          <a:effectRef idx="2">
-            <a:schemeClr val="accent1"/>
-          </a:effectRef>
-          <a:fontRef idx="minor">
-            <a:schemeClr val="lt1"/>
-          </a:fontRef>
-        </p:style>
-        <p:txBody>
-          <a:bodyPr rtlCol="0" anchor="ctr"/>
-          <a:lstStyle/>
-          <a:p>
-            <a:pPr algn="ctr"/>
-          </a:p>
-        </p:txBody>
-      </p:sp>
-      <p:sp>
-        <p:nvSpPr>
-          <p:cNvPr id="3" name="Rectangle 2"/>
-          <p:cNvSpPr/>
-          <p:nvPr/>
-        </p:nvSpPr>
-        <p:spPr>
-          <a:xfrm>
             <a:off x="0" y="0"/>
             <a:ext cx="12191695" cy="91440"/>
           </a:xfrm>
@@ -5400,14 +5233,272 @@
       </p:sp>
       <p:sp>
         <p:nvSpPr>
-          <p:cNvPr id="4" name="TextBox 3"/>
+          <p:cNvPr id="3" name="Rounded Rectangle 2"/>
+          <p:cNvSpPr/>
+          <p:nvPr/>
+        </p:nvSpPr>
+        <p:spPr>
+          <a:xfrm>
+            <a:off x="502920" y="685800"/>
+            <a:ext cx="11183112" cy="1051560"/>
+          </a:xfrm>
+          <a:prstGeom prst="roundRect">
+            <a:avLst/>
+          </a:prstGeom>
+          <a:solidFill>
+            <a:srgbClr val="081D3D"/>
+          </a:solidFill>
+          <a:ln>
+            <a:noFill/>
+          </a:ln>
+          <a:effectLst/>
+        </p:spPr>
+        <p:style>
+          <a:lnRef idx="1">
+            <a:schemeClr val="accent1"/>
+          </a:lnRef>
+          <a:fillRef idx="3">
+            <a:schemeClr val="accent1"/>
+          </a:fillRef>
+          <a:effectRef idx="2">
+            <a:schemeClr val="accent1"/>
+          </a:effectRef>
+          <a:fontRef idx="minor">
+            <a:schemeClr val="lt1"/>
+          </a:fontRef>
+        </p:style>
+        <p:txBody>
+          <a:bodyPr rtlCol="0" anchor="ctr"/>
+          <a:lstStyle/>
+          <a:p>
+            <a:pPr algn="ctr"/>
+          </a:p>
+        </p:txBody>
+      </p:sp>
+      <p:sp>
+        <p:nvSpPr>
+          <p:cNvPr id="4" name="Rectangle 3"/>
+          <p:cNvSpPr/>
+          <p:nvPr/>
+        </p:nvSpPr>
+        <p:spPr>
+          <a:xfrm>
+            <a:off x="502920" y="685800"/>
+            <a:ext cx="128016" cy="1051560"/>
+          </a:xfrm>
+          <a:prstGeom prst="rect">
+            <a:avLst/>
+          </a:prstGeom>
+          <a:solidFill>
+            <a:srgbClr val="FFC107"/>
+          </a:solidFill>
+          <a:ln>
+            <a:noFill/>
+          </a:ln>
+          <a:effectLst/>
+        </p:spPr>
+        <p:style>
+          <a:lnRef idx="1">
+            <a:schemeClr val="accent1"/>
+          </a:lnRef>
+          <a:fillRef idx="3">
+            <a:schemeClr val="accent1"/>
+          </a:fillRef>
+          <a:effectRef idx="2">
+            <a:schemeClr val="accent1"/>
+          </a:effectRef>
+          <a:fontRef idx="minor">
+            <a:schemeClr val="lt1"/>
+          </a:fontRef>
+        </p:style>
+        <p:txBody>
+          <a:bodyPr rtlCol="0" anchor="ctr"/>
+          <a:lstStyle/>
+          <a:p>
+            <a:pPr algn="ctr"/>
+          </a:p>
+        </p:txBody>
+      </p:sp>
+      <p:sp>
+        <p:nvSpPr>
+          <p:cNvPr id="5" name="TextBox 4"/>
           <p:cNvSpPr txBox="1"/>
           <p:nvPr/>
         </p:nvSpPr>
         <p:spPr>
           <a:xfrm>
-            <a:off x="731520" y="2377440"/>
-            <a:ext cx="10515600" cy="2377440"/>
+            <a:off x="868680" y="749808"/>
+            <a:ext cx="8686800" cy="914400"/>
+          </a:xfrm>
+          <a:prstGeom prst="rect">
+            <a:avLst/>
+          </a:prstGeom>
+          <a:noFill/>
+        </p:spPr>
+        <p:txBody>
+          <a:bodyPr wrap="square" anchor="ctr" lIns="73152" rIns="73152" tIns="36576" bIns="36576">
+            <a:spAutoFit/>
+          </a:bodyPr>
+          <a:lstStyle/>
+          <a:p>
+            <a:r>
+              <a:rPr sz="1100" b="1" i="0">
+                <a:solidFill>
+                  <a:srgbClr val="FFC107"/>
+                </a:solidFill>
+                <a:latin typeface="Segoe UI"/>
+              </a:rPr>
+              <a:t>4 · DIFICULDADES</a:t>
+            </a:r>
+          </a:p>
+          <a:p>
+            <a:r>
+              <a:rPr sz="2500" b="1" i="0">
+                <a:solidFill>
+                  <a:srgbClr val="EEF7FF"/>
+                </a:solidFill>
+                <a:latin typeface="Segoe UI"/>
+              </a:rPr>
+              <a:t>O que foi difícil e o que aprendemos</a:t>
+            </a:r>
+          </a:p>
+        </p:txBody>
+      </p:sp>
+      <p:sp>
+        <p:nvSpPr>
+          <p:cNvPr id="6" name="TextBox 5"/>
+          <p:cNvSpPr txBox="1"/>
+          <p:nvPr/>
+        </p:nvSpPr>
+        <p:spPr>
+          <a:xfrm>
+            <a:off x="8869680" y="749808"/>
+            <a:ext cx="2651760" cy="914400"/>
+          </a:xfrm>
+          <a:prstGeom prst="rect">
+            <a:avLst/>
+          </a:prstGeom>
+          <a:noFill/>
+        </p:spPr>
+        <p:txBody>
+          <a:bodyPr wrap="square" anchor="ctr" lIns="73152" rIns="73152" tIns="36576" bIns="36576">
+            <a:spAutoFit/>
+          </a:bodyPr>
+          <a:lstStyle/>
+          <a:p>
+            <a:pPr algn="r"/>
+            <a:r>
+              <a:rPr sz="1100" b="0" i="0">
+                <a:solidFill>
+                  <a:srgbClr val="9BB1CA"/>
+                </a:solidFill>
+                <a:latin typeface="Segoe UI"/>
+              </a:rPr>
+              <a:t>1–2 min</a:t>
+            </a:r>
+          </a:p>
+        </p:txBody>
+      </p:sp>
+      <p:sp>
+        <p:nvSpPr>
+          <p:cNvPr id="7" name="Rounded Rectangle 6"/>
+          <p:cNvSpPr/>
+          <p:nvPr/>
+        </p:nvSpPr>
+        <p:spPr>
+          <a:xfrm>
+            <a:off x="548640" y="2011680"/>
+            <a:ext cx="5440680" cy="4023360"/>
+          </a:xfrm>
+          <a:prstGeom prst="roundRect">
+            <a:avLst/>
+          </a:prstGeom>
+          <a:solidFill>
+            <a:srgbClr val="081D3D"/>
+          </a:solidFill>
+          <a:ln w="12700">
+            <a:solidFill>
+              <a:srgbClr val="1E3A5F"/>
+            </a:solidFill>
+          </a:ln>
+          <a:effectLst/>
+        </p:spPr>
+        <p:style>
+          <a:lnRef idx="1">
+            <a:schemeClr val="accent1"/>
+          </a:lnRef>
+          <a:fillRef idx="3">
+            <a:schemeClr val="accent1"/>
+          </a:fillRef>
+          <a:effectRef idx="2">
+            <a:schemeClr val="accent1"/>
+          </a:effectRef>
+          <a:fontRef idx="minor">
+            <a:schemeClr val="lt1"/>
+          </a:fontRef>
+        </p:style>
+        <p:txBody>
+          <a:bodyPr rtlCol="0" anchor="ctr"/>
+          <a:lstStyle/>
+          <a:p>
+            <a:pPr algn="ctr"/>
+          </a:p>
+        </p:txBody>
+      </p:sp>
+      <p:sp>
+        <p:nvSpPr>
+          <p:cNvPr id="8" name="Rectangle 7"/>
+          <p:cNvSpPr/>
+          <p:nvPr/>
+        </p:nvSpPr>
+        <p:spPr>
+          <a:xfrm>
+            <a:off x="548640" y="2011680"/>
+            <a:ext cx="5440680" cy="82296"/>
+          </a:xfrm>
+          <a:prstGeom prst="rect">
+            <a:avLst/>
+          </a:prstGeom>
+          <a:solidFill>
+            <a:srgbClr val="E04F5F"/>
+          </a:solidFill>
+          <a:ln>
+            <a:noFill/>
+          </a:ln>
+          <a:effectLst/>
+        </p:spPr>
+        <p:style>
+          <a:lnRef idx="1">
+            <a:schemeClr val="accent1"/>
+          </a:lnRef>
+          <a:fillRef idx="3">
+            <a:schemeClr val="accent1"/>
+          </a:fillRef>
+          <a:effectRef idx="2">
+            <a:schemeClr val="accent1"/>
+          </a:effectRef>
+          <a:fontRef idx="minor">
+            <a:schemeClr val="lt1"/>
+          </a:fontRef>
+        </p:style>
+        <p:txBody>
+          <a:bodyPr rtlCol="0" anchor="ctr"/>
+          <a:lstStyle/>
+          <a:p>
+            <a:pPr algn="ctr"/>
+          </a:p>
+        </p:txBody>
+      </p:sp>
+      <p:sp>
+        <p:nvSpPr>
+          <p:cNvPr id="9" name="TextBox 8"/>
+          <p:cNvSpPr txBox="1"/>
+          <p:nvPr/>
+        </p:nvSpPr>
+        <p:spPr>
+          <a:xfrm>
+            <a:off x="749808" y="2194560"/>
+            <a:ext cx="5038344" cy="3694176"/>
           </a:xfrm>
           <a:prstGeom prst="rect">
             <a:avLst/>
@@ -5420,6 +5511,1701 @@
           </a:bodyPr>
           <a:lstStyle/>
           <a:p>
+            <a:pPr>
+              <a:spcAft>
+                <a:spcPts val="700"/>
+              </a:spcAft>
+            </a:pPr>
+            <a:r>
+              <a:rPr sz="1800" b="1" i="0">
+                <a:solidFill>
+                  <a:srgbClr val="EEF7FF"/>
+                </a:solidFill>
+                <a:latin typeface="Segoe UI"/>
+              </a:rPr>
+              <a:t>Desafios</a:t>
+            </a:r>
+          </a:p>
+          <a:p>
+            <a:pPr>
+              <a:lnSpc>
+                <a:spcPct val="104000"/>
+              </a:lnSpc>
+              <a:spcAft>
+                <a:spcPts val="400"/>
+              </a:spcAft>
+            </a:pPr>
+            <a:r>
+              <a:rPr sz="1350" b="0" i="0">
+                <a:solidFill>
+                  <a:srgbClr val="E04F5F"/>
+                </a:solidFill>
+                <a:latin typeface="Segoe UI"/>
+              </a:rPr>
+              <a:t>• </a:t>
+            </a:r>
+            <a:r>
+              <a:rPr sz="1350" b="0" i="0">
+                <a:solidFill>
+                  <a:srgbClr val="9BB1CA"/>
+                </a:solidFill>
+                <a:latin typeface="Segoe UI"/>
+              </a:rPr>
+              <a:t>Modelar a negociação de troca por turnos</a:t>
+            </a:r>
+          </a:p>
+          <a:p>
+            <a:pPr>
+              <a:lnSpc>
+                <a:spcPct val="104000"/>
+              </a:lnSpc>
+              <a:spcAft>
+                <a:spcPts val="400"/>
+              </a:spcAft>
+            </a:pPr>
+            <a:r>
+              <a:rPr sz="1350" b="0" i="0">
+                <a:solidFill>
+                  <a:srgbClr val="E04F5F"/>
+                </a:solidFill>
+                <a:latin typeface="Segoe UI"/>
+              </a:rPr>
+              <a:t>• </a:t>
+            </a:r>
+            <a:r>
+              <a:rPr sz="1350" b="0" i="0">
+                <a:solidFill>
+                  <a:srgbClr val="9BB1CA"/>
+                </a:solidFill>
+                <a:latin typeface="Segoe UI"/>
+              </a:rPr>
+              <a:t>Garantir que os dois lados confirmem a entrega</a:t>
+            </a:r>
+          </a:p>
+          <a:p>
+            <a:pPr>
+              <a:lnSpc>
+                <a:spcPct val="104000"/>
+              </a:lnSpc>
+              <a:spcAft>
+                <a:spcPts val="400"/>
+              </a:spcAft>
+            </a:pPr>
+            <a:r>
+              <a:rPr sz="1350" b="0" i="0">
+                <a:solidFill>
+                  <a:srgbClr val="E04F5F"/>
+                </a:solidFill>
+                <a:latin typeface="Segoe UI"/>
+              </a:rPr>
+              <a:t>• </a:t>
+            </a:r>
+            <a:r>
+              <a:rPr sz="1350" b="0" i="0">
+                <a:solidFill>
+                  <a:srgbClr val="9BB1CA"/>
+                </a:solidFill>
+                <a:latin typeface="Segoe UI"/>
+              </a:rPr>
+              <a:t>Integrar pagamento e tratar o webhook</a:t>
+            </a:r>
+          </a:p>
+          <a:p>
+            <a:pPr>
+              <a:lnSpc>
+                <a:spcPct val="104000"/>
+              </a:lnSpc>
+              <a:spcAft>
+                <a:spcPts val="400"/>
+              </a:spcAft>
+            </a:pPr>
+            <a:r>
+              <a:rPr sz="1350" b="0" i="0">
+                <a:solidFill>
+                  <a:srgbClr val="E04F5F"/>
+                </a:solidFill>
+                <a:latin typeface="Segoe UI"/>
+              </a:rPr>
+              <a:t>• </a:t>
+            </a:r>
+            <a:r>
+              <a:rPr sz="1350" b="0" i="0">
+                <a:solidFill>
+                  <a:srgbClr val="9BB1CA"/>
+                </a:solidFill>
+                <a:latin typeface="Segoe UI"/>
+              </a:rPr>
+              <a:t>Validar CPF/CNPJ e aplicar máscaras</a:t>
+            </a:r>
+          </a:p>
+          <a:p>
+            <a:pPr>
+              <a:lnSpc>
+                <a:spcPct val="104000"/>
+              </a:lnSpc>
+              <a:spcAft>
+                <a:spcPts val="400"/>
+              </a:spcAft>
+            </a:pPr>
+            <a:r>
+              <a:rPr sz="1350" b="0" i="0">
+                <a:solidFill>
+                  <a:srgbClr val="E04F5F"/>
+                </a:solidFill>
+                <a:latin typeface="Segoe UI"/>
+              </a:rPr>
+              <a:t>• </a:t>
+            </a:r>
+            <a:r>
+              <a:rPr sz="1350" b="0" i="0">
+                <a:solidFill>
+                  <a:srgbClr val="9BB1CA"/>
+                </a:solidFill>
+                <a:latin typeface="Segoe UI"/>
+              </a:rPr>
+              <a:t>Manter o visual consistente em todas as telas</a:t>
+            </a:r>
+          </a:p>
+        </p:txBody>
+      </p:sp>
+      <p:sp>
+        <p:nvSpPr>
+          <p:cNvPr id="10" name="Rounded Rectangle 9"/>
+          <p:cNvSpPr/>
+          <p:nvPr/>
+        </p:nvSpPr>
+        <p:spPr>
+          <a:xfrm>
+            <a:off x="6199632" y="2011680"/>
+            <a:ext cx="5440680" cy="4023360"/>
+          </a:xfrm>
+          <a:prstGeom prst="roundRect">
+            <a:avLst/>
+          </a:prstGeom>
+          <a:solidFill>
+            <a:srgbClr val="081D3D"/>
+          </a:solidFill>
+          <a:ln w="12700">
+            <a:solidFill>
+              <a:srgbClr val="1E3A5F"/>
+            </a:solidFill>
+          </a:ln>
+          <a:effectLst/>
+        </p:spPr>
+        <p:style>
+          <a:lnRef idx="1">
+            <a:schemeClr val="accent1"/>
+          </a:lnRef>
+          <a:fillRef idx="3">
+            <a:schemeClr val="accent1"/>
+          </a:fillRef>
+          <a:effectRef idx="2">
+            <a:schemeClr val="accent1"/>
+          </a:effectRef>
+          <a:fontRef idx="minor">
+            <a:schemeClr val="lt1"/>
+          </a:fontRef>
+        </p:style>
+        <p:txBody>
+          <a:bodyPr rtlCol="0" anchor="ctr"/>
+          <a:lstStyle/>
+          <a:p>
+            <a:pPr algn="ctr"/>
+          </a:p>
+        </p:txBody>
+      </p:sp>
+      <p:sp>
+        <p:nvSpPr>
+          <p:cNvPr id="11" name="Rectangle 10"/>
+          <p:cNvSpPr/>
+          <p:nvPr/>
+        </p:nvSpPr>
+        <p:spPr>
+          <a:xfrm>
+            <a:off x="6199632" y="2011680"/>
+            <a:ext cx="5440680" cy="82296"/>
+          </a:xfrm>
+          <a:prstGeom prst="rect">
+            <a:avLst/>
+          </a:prstGeom>
+          <a:solidFill>
+            <a:srgbClr val="00FF88"/>
+          </a:solidFill>
+          <a:ln>
+            <a:noFill/>
+          </a:ln>
+          <a:effectLst/>
+        </p:spPr>
+        <p:style>
+          <a:lnRef idx="1">
+            <a:schemeClr val="accent1"/>
+          </a:lnRef>
+          <a:fillRef idx="3">
+            <a:schemeClr val="accent1"/>
+          </a:fillRef>
+          <a:effectRef idx="2">
+            <a:schemeClr val="accent1"/>
+          </a:effectRef>
+          <a:fontRef idx="minor">
+            <a:schemeClr val="lt1"/>
+          </a:fontRef>
+        </p:style>
+        <p:txBody>
+          <a:bodyPr rtlCol="0" anchor="ctr"/>
+          <a:lstStyle/>
+          <a:p>
+            <a:pPr algn="ctr"/>
+          </a:p>
+        </p:txBody>
+      </p:sp>
+      <p:sp>
+        <p:nvSpPr>
+          <p:cNvPr id="12" name="TextBox 11"/>
+          <p:cNvSpPr txBox="1"/>
+          <p:nvPr/>
+        </p:nvSpPr>
+        <p:spPr>
+          <a:xfrm>
+            <a:off x="6400800" y="2194560"/>
+            <a:ext cx="5038344" cy="3694176"/>
+          </a:xfrm>
+          <a:prstGeom prst="rect">
+            <a:avLst/>
+          </a:prstGeom>
+          <a:noFill/>
+        </p:spPr>
+        <p:txBody>
+          <a:bodyPr wrap="square" anchor="t" lIns="73152" rIns="73152" tIns="36576" bIns="36576">
+            <a:spAutoFit/>
+          </a:bodyPr>
+          <a:lstStyle/>
+          <a:p>
+            <a:pPr>
+              <a:spcAft>
+                <a:spcPts val="700"/>
+              </a:spcAft>
+            </a:pPr>
+            <a:r>
+              <a:rPr sz="1800" b="1" i="0">
+                <a:solidFill>
+                  <a:srgbClr val="EEF7FF"/>
+                </a:solidFill>
+                <a:latin typeface="Segoe UI"/>
+              </a:rPr>
+              <a:t>Aprendizados</a:t>
+            </a:r>
+          </a:p>
+          <a:p>
+            <a:pPr>
+              <a:lnSpc>
+                <a:spcPct val="104000"/>
+              </a:lnSpc>
+              <a:spcAft>
+                <a:spcPts val="400"/>
+              </a:spcAft>
+            </a:pPr>
+            <a:r>
+              <a:rPr sz="1350" b="0" i="0">
+                <a:solidFill>
+                  <a:srgbClr val="00FF88"/>
+                </a:solidFill>
+                <a:latin typeface="Segoe UI"/>
+              </a:rPr>
+              <a:t>• </a:t>
+            </a:r>
+            <a:r>
+              <a:rPr sz="1350" b="0" i="0">
+                <a:solidFill>
+                  <a:srgbClr val="9BB1CA"/>
+                </a:solidFill>
+                <a:latin typeface="Segoe UI"/>
+              </a:rPr>
+              <a:t>Modelagem de dados orienta todo o resto</a:t>
+            </a:r>
+          </a:p>
+          <a:p>
+            <a:pPr>
+              <a:lnSpc>
+                <a:spcPct val="104000"/>
+              </a:lnSpc>
+              <a:spcAft>
+                <a:spcPts val="400"/>
+              </a:spcAft>
+            </a:pPr>
+            <a:r>
+              <a:rPr sz="1350" b="0" i="0">
+                <a:solidFill>
+                  <a:srgbClr val="00FF88"/>
+                </a:solidFill>
+                <a:latin typeface="Segoe UI"/>
+              </a:rPr>
+              <a:t>• </a:t>
+            </a:r>
+            <a:r>
+              <a:rPr sz="1350" b="0" i="0">
+                <a:solidFill>
+                  <a:srgbClr val="9BB1CA"/>
+                </a:solidFill>
+                <a:latin typeface="Segoe UI"/>
+              </a:rPr>
+              <a:t>Separar a lógica em domínios facilita o trabalho em grupo</a:t>
+            </a:r>
+          </a:p>
+          <a:p>
+            <a:pPr>
+              <a:lnSpc>
+                <a:spcPct val="104000"/>
+              </a:lnSpc>
+              <a:spcAft>
+                <a:spcPts val="400"/>
+              </a:spcAft>
+            </a:pPr>
+            <a:r>
+              <a:rPr sz="1350" b="0" i="0">
+                <a:solidFill>
+                  <a:srgbClr val="00FF88"/>
+                </a:solidFill>
+                <a:latin typeface="Segoe UI"/>
+              </a:rPr>
+              <a:t>• </a:t>
+            </a:r>
+            <a:r>
+              <a:rPr sz="1350" b="0" i="0">
+                <a:solidFill>
+                  <a:srgbClr val="9BB1CA"/>
+                </a:solidFill>
+                <a:latin typeface="Segoe UI"/>
+              </a:rPr>
+              <a:t>Testes dão segurança para mexer no código</a:t>
+            </a:r>
+          </a:p>
+          <a:p>
+            <a:pPr>
+              <a:lnSpc>
+                <a:spcPct val="104000"/>
+              </a:lnSpc>
+              <a:spcAft>
+                <a:spcPts val="400"/>
+              </a:spcAft>
+            </a:pPr>
+            <a:r>
+              <a:rPr sz="1350" b="0" i="0">
+                <a:solidFill>
+                  <a:srgbClr val="00FF88"/>
+                </a:solidFill>
+                <a:latin typeface="Segoe UI"/>
+              </a:rPr>
+              <a:t>• </a:t>
+            </a:r>
+            <a:r>
+              <a:rPr sz="1350" b="0" i="0">
+                <a:solidFill>
+                  <a:srgbClr val="9BB1CA"/>
+                </a:solidFill>
+                <a:latin typeface="Segoe UI"/>
+              </a:rPr>
+              <a:t>Validar no backend, não só no frontend</a:t>
+            </a:r>
+          </a:p>
+          <a:p>
+            <a:pPr>
+              <a:lnSpc>
+                <a:spcPct val="104000"/>
+              </a:lnSpc>
+              <a:spcAft>
+                <a:spcPts val="400"/>
+              </a:spcAft>
+            </a:pPr>
+            <a:r>
+              <a:rPr sz="1350" b="0" i="0">
+                <a:solidFill>
+                  <a:srgbClr val="00FF88"/>
+                </a:solidFill>
+                <a:latin typeface="Segoe UI"/>
+              </a:rPr>
+              <a:t>• </a:t>
+            </a:r>
+            <a:r>
+              <a:rPr sz="1350" b="0" i="0">
+                <a:solidFill>
+                  <a:srgbClr val="9BB1CA"/>
+                </a:solidFill>
+                <a:latin typeface="Segoe UI"/>
+              </a:rPr>
+              <a:t>Git com commits frequentes salva o projeto</a:t>
+            </a:r>
+          </a:p>
+        </p:txBody>
+      </p:sp>
+      <p:sp>
+        <p:nvSpPr>
+          <p:cNvPr id="13" name="TextBox 12"/>
+          <p:cNvSpPr txBox="1"/>
+          <p:nvPr/>
+        </p:nvSpPr>
+        <p:spPr>
+          <a:xfrm>
+            <a:off x="502920" y="6446520"/>
+            <a:ext cx="11155680" cy="320040"/>
+          </a:xfrm>
+          <a:prstGeom prst="rect">
+            <a:avLst/>
+          </a:prstGeom>
+          <a:noFill/>
+        </p:spPr>
+        <p:txBody>
+          <a:bodyPr wrap="square" anchor="ctr" lIns="73152" rIns="73152" tIns="36576" bIns="36576">
+            <a:spAutoFit/>
+          </a:bodyPr>
+          <a:lstStyle/>
+          <a:p>
+            <a:r>
+              <a:rPr sz="900" b="1" i="0">
+                <a:solidFill>
+                  <a:srgbClr val="3AF6FF"/>
+                </a:solidFill>
+                <a:latin typeface="Segoe UI"/>
+              </a:rPr>
+              <a:t>Tech Hub</a:t>
+            </a:r>
+            <a:r>
+              <a:rPr sz="900" b="0" i="0">
+                <a:solidFill>
+                  <a:srgbClr val="6B7A99"/>
+                </a:solidFill>
+                <a:latin typeface="Segoe UI"/>
+              </a:rPr>
+              <a:t>  ·  Marketplace de Tecnologia  ·  Programação Back-End</a:t>
+            </a:r>
+          </a:p>
+        </p:txBody>
+      </p:sp>
+      <p:sp>
+        <p:nvSpPr>
+          <p:cNvPr id="14" name="TextBox 13"/>
+          <p:cNvSpPr txBox="1"/>
+          <p:nvPr/>
+        </p:nvSpPr>
+        <p:spPr>
+          <a:xfrm>
+            <a:off x="10789920" y="6446520"/>
+            <a:ext cx="914400" cy="320040"/>
+          </a:xfrm>
+          <a:prstGeom prst="rect">
+            <a:avLst/>
+          </a:prstGeom>
+          <a:noFill/>
+        </p:spPr>
+        <p:txBody>
+          <a:bodyPr wrap="square" anchor="ctr" lIns="73152" rIns="73152" tIns="36576" bIns="36576">
+            <a:spAutoFit/>
+          </a:bodyPr>
+          <a:lstStyle/>
+          <a:p>
+            <a:pPr algn="r"/>
+            <a:r>
+              <a:rPr sz="900" b="0" i="0">
+                <a:solidFill>
+                  <a:srgbClr val="6B7A99"/>
+                </a:solidFill>
+                <a:latin typeface="Segoe UI"/>
+              </a:rPr>
+              <a:t>12</a:t>
+            </a:r>
+          </a:p>
+        </p:txBody>
+      </p:sp>
+    </p:spTree>
+  </p:cSld>
+  <p:clrMapOvr>
+    <a:masterClrMapping/>
+  </p:clrMapOvr>
+</p:sld>
+</file>
+
+<file path=ppt/slides/slide13.xml><?xml version="1.0" encoding="utf-8"?>
+<p:sld xmlns:a="http://schemas.openxmlformats.org/drawingml/2006/main" xmlns:p="http://schemas.openxmlformats.org/presentationml/2006/main" xmlns:r="http://schemas.openxmlformats.org/officeDocument/2006/relationships">
+  <p:cSld>
+    <p:bg>
+      <p:bgPr>
+        <a:solidFill>
+          <a:srgbClr val="041123"/>
+        </a:solidFill>
+        <a:effectLst/>
+      </p:bgPr>
+    </p:bg>
+    <p:spTree>
+      <p:nvGrpSpPr>
+        <p:cNvPr id="1" name=""/>
+        <p:cNvGrpSpPr/>
+        <p:nvPr/>
+      </p:nvGrpSpPr>
+      <p:grpSpPr/>
+      <p:sp>
+        <p:nvSpPr>
+          <p:cNvPr id="2" name="Rectangle 1"/>
+          <p:cNvSpPr/>
+          <p:nvPr/>
+        </p:nvSpPr>
+        <p:spPr>
+          <a:xfrm>
+            <a:off x="0" y="0"/>
+            <a:ext cx="12191695" cy="91440"/>
+          </a:xfrm>
+          <a:prstGeom prst="rect">
+            <a:avLst/>
+          </a:prstGeom>
+          <a:gradFill>
+            <a:gsLst>
+              <a:gs pos="0">
+                <a:srgbClr val="3AF6FF"/>
+              </a:gs>
+              <a:gs pos="100000">
+                <a:srgbClr val="0FA7FF"/>
+              </a:gs>
+            </a:gsLst>
+            <a:lin ang="0" scaled="1"/>
+          </a:gradFill>
+          <a:ln>
+            <a:noFill/>
+          </a:ln>
+          <a:effectLst/>
+        </p:spPr>
+        <p:style>
+          <a:lnRef idx="1">
+            <a:schemeClr val="accent1"/>
+          </a:lnRef>
+          <a:fillRef idx="3">
+            <a:schemeClr val="accent1"/>
+          </a:fillRef>
+          <a:effectRef idx="2">
+            <a:schemeClr val="accent1"/>
+          </a:effectRef>
+          <a:fontRef idx="minor">
+            <a:schemeClr val="lt1"/>
+          </a:fontRef>
+        </p:style>
+        <p:txBody>
+          <a:bodyPr rtlCol="0" anchor="ctr"/>
+          <a:lstStyle/>
+          <a:p>
+            <a:pPr algn="ctr"/>
+          </a:p>
+        </p:txBody>
+      </p:sp>
+      <p:sp>
+        <p:nvSpPr>
+          <p:cNvPr id="3" name="Rounded Rectangle 2"/>
+          <p:cNvSpPr/>
+          <p:nvPr/>
+        </p:nvSpPr>
+        <p:spPr>
+          <a:xfrm>
+            <a:off x="502920" y="685800"/>
+            <a:ext cx="11183112" cy="1051560"/>
+          </a:xfrm>
+          <a:prstGeom prst="roundRect">
+            <a:avLst/>
+          </a:prstGeom>
+          <a:solidFill>
+            <a:srgbClr val="081D3D"/>
+          </a:solidFill>
+          <a:ln>
+            <a:noFill/>
+          </a:ln>
+          <a:effectLst/>
+        </p:spPr>
+        <p:style>
+          <a:lnRef idx="1">
+            <a:schemeClr val="accent1"/>
+          </a:lnRef>
+          <a:fillRef idx="3">
+            <a:schemeClr val="accent1"/>
+          </a:fillRef>
+          <a:effectRef idx="2">
+            <a:schemeClr val="accent1"/>
+          </a:effectRef>
+          <a:fontRef idx="minor">
+            <a:schemeClr val="lt1"/>
+          </a:fontRef>
+        </p:style>
+        <p:txBody>
+          <a:bodyPr rtlCol="0" anchor="ctr"/>
+          <a:lstStyle/>
+          <a:p>
+            <a:pPr algn="ctr"/>
+          </a:p>
+        </p:txBody>
+      </p:sp>
+      <p:sp>
+        <p:nvSpPr>
+          <p:cNvPr id="4" name="Rectangle 3"/>
+          <p:cNvSpPr/>
+          <p:nvPr/>
+        </p:nvSpPr>
+        <p:spPr>
+          <a:xfrm>
+            <a:off x="502920" y="685800"/>
+            <a:ext cx="128016" cy="1051560"/>
+          </a:xfrm>
+          <a:prstGeom prst="rect">
+            <a:avLst/>
+          </a:prstGeom>
+          <a:solidFill>
+            <a:srgbClr val="3AF6FF"/>
+          </a:solidFill>
+          <a:ln>
+            <a:noFill/>
+          </a:ln>
+          <a:effectLst/>
+        </p:spPr>
+        <p:style>
+          <a:lnRef idx="1">
+            <a:schemeClr val="accent1"/>
+          </a:lnRef>
+          <a:fillRef idx="3">
+            <a:schemeClr val="accent1"/>
+          </a:fillRef>
+          <a:effectRef idx="2">
+            <a:schemeClr val="accent1"/>
+          </a:effectRef>
+          <a:fontRef idx="minor">
+            <a:schemeClr val="lt1"/>
+          </a:fontRef>
+        </p:style>
+        <p:txBody>
+          <a:bodyPr rtlCol="0" anchor="ctr"/>
+          <a:lstStyle/>
+          <a:p>
+            <a:pPr algn="ctr"/>
+          </a:p>
+        </p:txBody>
+      </p:sp>
+      <p:sp>
+        <p:nvSpPr>
+          <p:cNvPr id="5" name="TextBox 4"/>
+          <p:cNvSpPr txBox="1"/>
+          <p:nvPr/>
+        </p:nvSpPr>
+        <p:spPr>
+          <a:xfrm>
+            <a:off x="868680" y="749808"/>
+            <a:ext cx="8686800" cy="914400"/>
+          </a:xfrm>
+          <a:prstGeom prst="rect">
+            <a:avLst/>
+          </a:prstGeom>
+          <a:noFill/>
+        </p:spPr>
+        <p:txBody>
+          <a:bodyPr wrap="square" anchor="ctr" lIns="73152" rIns="73152" tIns="36576" bIns="36576">
+            <a:spAutoFit/>
+          </a:bodyPr>
+          <a:lstStyle/>
+          <a:p>
+            <a:r>
+              <a:rPr sz="1100" b="1" i="0">
+                <a:solidFill>
+                  <a:srgbClr val="3AF6FF"/>
+                </a:solidFill>
+                <a:latin typeface="Segoe UI"/>
+              </a:rPr>
+              <a:t>ROADMAP</a:t>
+            </a:r>
+          </a:p>
+          <a:p>
+            <a:r>
+              <a:rPr sz="2500" b="1" i="0">
+                <a:solidFill>
+                  <a:srgbClr val="EEF7FF"/>
+                </a:solidFill>
+                <a:latin typeface="Segoe UI"/>
+              </a:rPr>
+              <a:t>Próximos passos</a:t>
+            </a:r>
+          </a:p>
+        </p:txBody>
+      </p:sp>
+      <p:sp>
+        <p:nvSpPr>
+          <p:cNvPr id="6" name="TextBox 5"/>
+          <p:cNvSpPr txBox="1"/>
+          <p:nvPr/>
+        </p:nvSpPr>
+        <p:spPr>
+          <a:xfrm>
+            <a:off x="8869680" y="749808"/>
+            <a:ext cx="2651760" cy="914400"/>
+          </a:xfrm>
+          <a:prstGeom prst="rect">
+            <a:avLst/>
+          </a:prstGeom>
+          <a:noFill/>
+        </p:spPr>
+        <p:txBody>
+          <a:bodyPr wrap="square" anchor="ctr" lIns="73152" rIns="73152" tIns="36576" bIns="36576">
+            <a:spAutoFit/>
+          </a:bodyPr>
+          <a:lstStyle/>
+          <a:p>
+            <a:pPr algn="r"/>
+            <a:r>
+              <a:rPr sz="1100" b="0" i="0">
+                <a:solidFill>
+                  <a:srgbClr val="9BB1CA"/>
+                </a:solidFill>
+                <a:latin typeface="Segoe UI"/>
+              </a:rPr>
+              <a:t>Etapa 7 · Deploy</a:t>
+            </a:r>
+          </a:p>
+        </p:txBody>
+      </p:sp>
+      <p:sp>
+        <p:nvSpPr>
+          <p:cNvPr id="7" name="Rounded Rectangle 6"/>
+          <p:cNvSpPr/>
+          <p:nvPr/>
+        </p:nvSpPr>
+        <p:spPr>
+          <a:xfrm>
+            <a:off x="548640" y="2011680"/>
+            <a:ext cx="3566160" cy="4023360"/>
+          </a:xfrm>
+          <a:prstGeom prst="roundRect">
+            <a:avLst/>
+          </a:prstGeom>
+          <a:solidFill>
+            <a:srgbClr val="081D3D"/>
+          </a:solidFill>
+          <a:ln w="12700">
+            <a:solidFill>
+              <a:srgbClr val="1E3A5F"/>
+            </a:solidFill>
+          </a:ln>
+          <a:effectLst/>
+        </p:spPr>
+        <p:style>
+          <a:lnRef idx="1">
+            <a:schemeClr val="accent1"/>
+          </a:lnRef>
+          <a:fillRef idx="3">
+            <a:schemeClr val="accent1"/>
+          </a:fillRef>
+          <a:effectRef idx="2">
+            <a:schemeClr val="accent1"/>
+          </a:effectRef>
+          <a:fontRef idx="minor">
+            <a:schemeClr val="lt1"/>
+          </a:fontRef>
+        </p:style>
+        <p:txBody>
+          <a:bodyPr rtlCol="0" anchor="ctr"/>
+          <a:lstStyle/>
+          <a:p>
+            <a:pPr algn="ctr"/>
+          </a:p>
+        </p:txBody>
+      </p:sp>
+      <p:sp>
+        <p:nvSpPr>
+          <p:cNvPr id="8" name="Rectangle 7"/>
+          <p:cNvSpPr/>
+          <p:nvPr/>
+        </p:nvSpPr>
+        <p:spPr>
+          <a:xfrm>
+            <a:off x="548640" y="2011680"/>
+            <a:ext cx="3566160" cy="82296"/>
+          </a:xfrm>
+          <a:prstGeom prst="rect">
+            <a:avLst/>
+          </a:prstGeom>
+          <a:solidFill>
+            <a:srgbClr val="FFC107"/>
+          </a:solidFill>
+          <a:ln>
+            <a:noFill/>
+          </a:ln>
+          <a:effectLst/>
+        </p:spPr>
+        <p:style>
+          <a:lnRef idx="1">
+            <a:schemeClr val="accent1"/>
+          </a:lnRef>
+          <a:fillRef idx="3">
+            <a:schemeClr val="accent1"/>
+          </a:fillRef>
+          <a:effectRef idx="2">
+            <a:schemeClr val="accent1"/>
+          </a:effectRef>
+          <a:fontRef idx="minor">
+            <a:schemeClr val="lt1"/>
+          </a:fontRef>
+        </p:style>
+        <p:txBody>
+          <a:bodyPr rtlCol="0" anchor="ctr"/>
+          <a:lstStyle/>
+          <a:p>
+            <a:pPr algn="ctr"/>
+          </a:p>
+        </p:txBody>
+      </p:sp>
+      <p:sp>
+        <p:nvSpPr>
+          <p:cNvPr id="9" name="TextBox 8"/>
+          <p:cNvSpPr txBox="1"/>
+          <p:nvPr/>
+        </p:nvSpPr>
+        <p:spPr>
+          <a:xfrm>
+            <a:off x="749808" y="2194560"/>
+            <a:ext cx="3163824" cy="3694176"/>
+          </a:xfrm>
+          <a:prstGeom prst="rect">
+            <a:avLst/>
+          </a:prstGeom>
+          <a:noFill/>
+        </p:spPr>
+        <p:txBody>
+          <a:bodyPr wrap="square" anchor="t" lIns="73152" rIns="73152" tIns="36576" bIns="36576">
+            <a:spAutoFit/>
+          </a:bodyPr>
+          <a:lstStyle/>
+          <a:p>
+            <a:pPr>
+              <a:spcAft>
+                <a:spcPts val="700"/>
+              </a:spcAft>
+            </a:pPr>
+            <a:r>
+              <a:rPr sz="1500" b="1" i="0">
+                <a:solidFill>
+                  <a:srgbClr val="EEF7FF"/>
+                </a:solidFill>
+                <a:latin typeface="Segoe UI"/>
+              </a:rPr>
+              <a:t>Em andamento</a:t>
+            </a:r>
+          </a:p>
+          <a:p>
+            <a:pPr>
+              <a:lnSpc>
+                <a:spcPct val="104000"/>
+              </a:lnSpc>
+              <a:spcAft>
+                <a:spcPts val="400"/>
+              </a:spcAft>
+            </a:pPr>
+            <a:r>
+              <a:rPr sz="1300" b="0" i="0">
+                <a:solidFill>
+                  <a:srgbClr val="FFC107"/>
+                </a:solidFill>
+                <a:latin typeface="Segoe UI"/>
+              </a:rPr>
+              <a:t>• </a:t>
+            </a:r>
+            <a:r>
+              <a:rPr sz="1300" b="0" i="0">
+                <a:solidFill>
+                  <a:srgbClr val="9BB1CA"/>
+                </a:solidFill>
+                <a:latin typeface="Segoe UI"/>
+              </a:rPr>
+              <a:t>Deploy em produção (Railway / Render)</a:t>
+            </a:r>
+          </a:p>
+          <a:p>
+            <a:pPr>
+              <a:lnSpc>
+                <a:spcPct val="104000"/>
+              </a:lnSpc>
+              <a:spcAft>
+                <a:spcPts val="400"/>
+              </a:spcAft>
+            </a:pPr>
+            <a:r>
+              <a:rPr sz="1300" b="0" i="0">
+                <a:solidFill>
+                  <a:srgbClr val="FFC107"/>
+                </a:solidFill>
+                <a:latin typeface="Segoe UI"/>
+              </a:rPr>
+              <a:t>• </a:t>
+            </a:r>
+            <a:r>
+              <a:rPr sz="1300" b="0" i="0">
+                <a:solidFill>
+                  <a:srgbClr val="9BB1CA"/>
+                </a:solidFill>
+                <a:latin typeface="Segoe UI"/>
+              </a:rPr>
+              <a:t>collectstatic + Postgres gerenciado</a:t>
+            </a:r>
+          </a:p>
+          <a:p>
+            <a:pPr>
+              <a:lnSpc>
+                <a:spcPct val="104000"/>
+              </a:lnSpc>
+              <a:spcAft>
+                <a:spcPts val="400"/>
+              </a:spcAft>
+            </a:pPr>
+            <a:r>
+              <a:rPr sz="1300" b="0" i="0">
+                <a:solidFill>
+                  <a:srgbClr val="FFC107"/>
+                </a:solidFill>
+                <a:latin typeface="Segoe UI"/>
+              </a:rPr>
+              <a:t>• </a:t>
+            </a:r>
+            <a:r>
+              <a:rPr sz="1300" b="0" i="0">
+                <a:solidFill>
+                  <a:srgbClr val="9BB1CA"/>
+                </a:solidFill>
+                <a:latin typeface="Segoe UI"/>
+              </a:rPr>
+              <a:t>Variáveis de ambiente no servidor</a:t>
+            </a:r>
+          </a:p>
+          <a:p>
+            <a:pPr>
+              <a:lnSpc>
+                <a:spcPct val="104000"/>
+              </a:lnSpc>
+              <a:spcAft>
+                <a:spcPts val="400"/>
+              </a:spcAft>
+            </a:pPr>
+            <a:r>
+              <a:rPr sz="1300" b="0" i="0">
+                <a:solidFill>
+                  <a:srgbClr val="FFC107"/>
+                </a:solidFill>
+                <a:latin typeface="Segoe UI"/>
+              </a:rPr>
+              <a:t>• </a:t>
+            </a:r>
+            <a:r>
+              <a:rPr sz="1300" b="0" i="0">
+                <a:solidFill>
+                  <a:srgbClr val="9BB1CA"/>
+                </a:solidFill>
+                <a:latin typeface="Segoe UI"/>
+              </a:rPr>
+              <a:t>Domínio e HTTPS</a:t>
+            </a:r>
+          </a:p>
+        </p:txBody>
+      </p:sp>
+      <p:sp>
+        <p:nvSpPr>
+          <p:cNvPr id="10" name="Rounded Rectangle 9"/>
+          <p:cNvSpPr/>
+          <p:nvPr/>
+        </p:nvSpPr>
+        <p:spPr>
+          <a:xfrm>
+            <a:off x="4315968" y="2011680"/>
+            <a:ext cx="3566160" cy="4023360"/>
+          </a:xfrm>
+          <a:prstGeom prst="roundRect">
+            <a:avLst/>
+          </a:prstGeom>
+          <a:solidFill>
+            <a:srgbClr val="081D3D"/>
+          </a:solidFill>
+          <a:ln w="12700">
+            <a:solidFill>
+              <a:srgbClr val="1E3A5F"/>
+            </a:solidFill>
+          </a:ln>
+          <a:effectLst/>
+        </p:spPr>
+        <p:style>
+          <a:lnRef idx="1">
+            <a:schemeClr val="accent1"/>
+          </a:lnRef>
+          <a:fillRef idx="3">
+            <a:schemeClr val="accent1"/>
+          </a:fillRef>
+          <a:effectRef idx="2">
+            <a:schemeClr val="accent1"/>
+          </a:effectRef>
+          <a:fontRef idx="minor">
+            <a:schemeClr val="lt1"/>
+          </a:fontRef>
+        </p:style>
+        <p:txBody>
+          <a:bodyPr rtlCol="0" anchor="ctr"/>
+          <a:lstStyle/>
+          <a:p>
+            <a:pPr algn="ctr"/>
+          </a:p>
+        </p:txBody>
+      </p:sp>
+      <p:sp>
+        <p:nvSpPr>
+          <p:cNvPr id="11" name="Rectangle 10"/>
+          <p:cNvSpPr/>
+          <p:nvPr/>
+        </p:nvSpPr>
+        <p:spPr>
+          <a:xfrm>
+            <a:off x="4315968" y="2011680"/>
+            <a:ext cx="3566160" cy="82296"/>
+          </a:xfrm>
+          <a:prstGeom prst="rect">
+            <a:avLst/>
+          </a:prstGeom>
+          <a:solidFill>
+            <a:srgbClr val="0FA7FF"/>
+          </a:solidFill>
+          <a:ln>
+            <a:noFill/>
+          </a:ln>
+          <a:effectLst/>
+        </p:spPr>
+        <p:style>
+          <a:lnRef idx="1">
+            <a:schemeClr val="accent1"/>
+          </a:lnRef>
+          <a:fillRef idx="3">
+            <a:schemeClr val="accent1"/>
+          </a:fillRef>
+          <a:effectRef idx="2">
+            <a:schemeClr val="accent1"/>
+          </a:effectRef>
+          <a:fontRef idx="minor">
+            <a:schemeClr val="lt1"/>
+          </a:fontRef>
+        </p:style>
+        <p:txBody>
+          <a:bodyPr rtlCol="0" anchor="ctr"/>
+          <a:lstStyle/>
+          <a:p>
+            <a:pPr algn="ctr"/>
+          </a:p>
+        </p:txBody>
+      </p:sp>
+      <p:sp>
+        <p:nvSpPr>
+          <p:cNvPr id="12" name="TextBox 11"/>
+          <p:cNvSpPr txBox="1"/>
+          <p:nvPr/>
+        </p:nvSpPr>
+        <p:spPr>
+          <a:xfrm>
+            <a:off x="4517136" y="2194560"/>
+            <a:ext cx="3163824" cy="3694176"/>
+          </a:xfrm>
+          <a:prstGeom prst="rect">
+            <a:avLst/>
+          </a:prstGeom>
+          <a:noFill/>
+        </p:spPr>
+        <p:txBody>
+          <a:bodyPr wrap="square" anchor="t" lIns="73152" rIns="73152" tIns="36576" bIns="36576">
+            <a:spAutoFit/>
+          </a:bodyPr>
+          <a:lstStyle/>
+          <a:p>
+            <a:pPr>
+              <a:spcAft>
+                <a:spcPts val="700"/>
+              </a:spcAft>
+            </a:pPr>
+            <a:r>
+              <a:rPr sz="1500" b="1" i="0">
+                <a:solidFill>
+                  <a:srgbClr val="EEF7FF"/>
+                </a:solidFill>
+                <a:latin typeface="Segoe UI"/>
+              </a:rPr>
+              <a:t>Melhorias planejadas</a:t>
+            </a:r>
+          </a:p>
+          <a:p>
+            <a:pPr>
+              <a:lnSpc>
+                <a:spcPct val="104000"/>
+              </a:lnSpc>
+              <a:spcAft>
+                <a:spcPts val="400"/>
+              </a:spcAft>
+            </a:pPr>
+            <a:r>
+              <a:rPr sz="1300" b="0" i="0">
+                <a:solidFill>
+                  <a:srgbClr val="0FA7FF"/>
+                </a:solidFill>
+                <a:latin typeface="Segoe UI"/>
+              </a:rPr>
+              <a:t>• </a:t>
+            </a:r>
+            <a:r>
+              <a:rPr sz="1300" b="0" i="0">
+                <a:solidFill>
+                  <a:srgbClr val="9BB1CA"/>
+                </a:solidFill>
+                <a:latin typeface="Segoe UI"/>
+              </a:rPr>
+              <a:t>Avaliações de vendedor (RF06)</a:t>
+            </a:r>
+          </a:p>
+          <a:p>
+            <a:pPr>
+              <a:lnSpc>
+                <a:spcPct val="104000"/>
+              </a:lnSpc>
+              <a:spcAft>
+                <a:spcPts val="400"/>
+              </a:spcAft>
+            </a:pPr>
+            <a:r>
+              <a:rPr sz="1300" b="0" i="0">
+                <a:solidFill>
+                  <a:srgbClr val="0FA7FF"/>
+                </a:solidFill>
+                <a:latin typeface="Segoe UI"/>
+              </a:rPr>
+              <a:t>• </a:t>
+            </a:r>
+            <a:r>
+              <a:rPr sz="1300" b="0" i="0">
+                <a:solidFill>
+                  <a:srgbClr val="9BB1CA"/>
+                </a:solidFill>
+                <a:latin typeface="Segoe UI"/>
+              </a:rPr>
+              <a:t>Chat em tempo real (WebSockets)</a:t>
+            </a:r>
+          </a:p>
+          <a:p>
+            <a:pPr>
+              <a:lnSpc>
+                <a:spcPct val="104000"/>
+              </a:lnSpc>
+              <a:spcAft>
+                <a:spcPts val="400"/>
+              </a:spcAft>
+            </a:pPr>
+            <a:r>
+              <a:rPr sz="1300" b="0" i="0">
+                <a:solidFill>
+                  <a:srgbClr val="0FA7FF"/>
+                </a:solidFill>
+                <a:latin typeface="Segoe UI"/>
+              </a:rPr>
+              <a:t>• </a:t>
+            </a:r>
+            <a:r>
+              <a:rPr sz="1300" b="0" i="0">
+                <a:solidFill>
+                  <a:srgbClr val="9BB1CA"/>
+                </a:solidFill>
+                <a:latin typeface="Segoe UI"/>
+              </a:rPr>
+              <a:t>Imagens em cloud storage</a:t>
+            </a:r>
+          </a:p>
+          <a:p>
+            <a:pPr>
+              <a:lnSpc>
+                <a:spcPct val="104000"/>
+              </a:lnSpc>
+              <a:spcAft>
+                <a:spcPts val="400"/>
+              </a:spcAft>
+            </a:pPr>
+            <a:r>
+              <a:rPr sz="1300" b="0" i="0">
+                <a:solidFill>
+                  <a:srgbClr val="0FA7FF"/>
+                </a:solidFill>
+                <a:latin typeface="Segoe UI"/>
+              </a:rPr>
+              <a:t>• </a:t>
+            </a:r>
+            <a:r>
+              <a:rPr sz="1300" b="0" i="0">
+                <a:solidFill>
+                  <a:srgbClr val="9BB1CA"/>
+                </a:solidFill>
+                <a:latin typeface="Segoe UI"/>
+              </a:rPr>
+              <a:t>Notificações de negociação</a:t>
+            </a:r>
+          </a:p>
+        </p:txBody>
+      </p:sp>
+      <p:sp>
+        <p:nvSpPr>
+          <p:cNvPr id="13" name="Rounded Rectangle 12"/>
+          <p:cNvSpPr/>
+          <p:nvPr/>
+        </p:nvSpPr>
+        <p:spPr>
+          <a:xfrm>
+            <a:off x="8083296" y="2011680"/>
+            <a:ext cx="3566160" cy="4023360"/>
+          </a:xfrm>
+          <a:prstGeom prst="roundRect">
+            <a:avLst/>
+          </a:prstGeom>
+          <a:solidFill>
+            <a:srgbClr val="081D3D"/>
+          </a:solidFill>
+          <a:ln w="12700">
+            <a:solidFill>
+              <a:srgbClr val="1E3A5F"/>
+            </a:solidFill>
+          </a:ln>
+          <a:effectLst/>
+        </p:spPr>
+        <p:style>
+          <a:lnRef idx="1">
+            <a:schemeClr val="accent1"/>
+          </a:lnRef>
+          <a:fillRef idx="3">
+            <a:schemeClr val="accent1"/>
+          </a:fillRef>
+          <a:effectRef idx="2">
+            <a:schemeClr val="accent1"/>
+          </a:effectRef>
+          <a:fontRef idx="minor">
+            <a:schemeClr val="lt1"/>
+          </a:fontRef>
+        </p:style>
+        <p:txBody>
+          <a:bodyPr rtlCol="0" anchor="ctr"/>
+          <a:lstStyle/>
+          <a:p>
+            <a:pPr algn="ctr"/>
+          </a:p>
+        </p:txBody>
+      </p:sp>
+      <p:sp>
+        <p:nvSpPr>
+          <p:cNvPr id="14" name="Rectangle 13"/>
+          <p:cNvSpPr/>
+          <p:nvPr/>
+        </p:nvSpPr>
+        <p:spPr>
+          <a:xfrm>
+            <a:off x="8083296" y="2011680"/>
+            <a:ext cx="3566160" cy="82296"/>
+          </a:xfrm>
+          <a:prstGeom prst="rect">
+            <a:avLst/>
+          </a:prstGeom>
+          <a:solidFill>
+            <a:srgbClr val="00FF88"/>
+          </a:solidFill>
+          <a:ln>
+            <a:noFill/>
+          </a:ln>
+          <a:effectLst/>
+        </p:spPr>
+        <p:style>
+          <a:lnRef idx="1">
+            <a:schemeClr val="accent1"/>
+          </a:lnRef>
+          <a:fillRef idx="3">
+            <a:schemeClr val="accent1"/>
+          </a:fillRef>
+          <a:effectRef idx="2">
+            <a:schemeClr val="accent1"/>
+          </a:effectRef>
+          <a:fontRef idx="minor">
+            <a:schemeClr val="lt1"/>
+          </a:fontRef>
+        </p:style>
+        <p:txBody>
+          <a:bodyPr rtlCol="0" anchor="ctr"/>
+          <a:lstStyle/>
+          <a:p>
+            <a:pPr algn="ctr"/>
+          </a:p>
+        </p:txBody>
+      </p:sp>
+      <p:sp>
+        <p:nvSpPr>
+          <p:cNvPr id="15" name="TextBox 14"/>
+          <p:cNvSpPr txBox="1"/>
+          <p:nvPr/>
+        </p:nvSpPr>
+        <p:spPr>
+          <a:xfrm>
+            <a:off x="8284464" y="2194560"/>
+            <a:ext cx="3163824" cy="3694176"/>
+          </a:xfrm>
+          <a:prstGeom prst="rect">
+            <a:avLst/>
+          </a:prstGeom>
+          <a:noFill/>
+        </p:spPr>
+        <p:txBody>
+          <a:bodyPr wrap="square" anchor="t" lIns="73152" rIns="73152" tIns="36576" bIns="36576">
+            <a:spAutoFit/>
+          </a:bodyPr>
+          <a:lstStyle/>
+          <a:p>
+            <a:pPr>
+              <a:spcAft>
+                <a:spcPts val="700"/>
+              </a:spcAft>
+            </a:pPr>
+            <a:r>
+              <a:rPr sz="1500" b="1" i="0">
+                <a:solidFill>
+                  <a:srgbClr val="EEF7FF"/>
+                </a:solidFill>
+                <a:latin typeface="Segoe UI"/>
+              </a:rPr>
+              <a:t>Polimento</a:t>
+            </a:r>
+          </a:p>
+          <a:p>
+            <a:pPr>
+              <a:lnSpc>
+                <a:spcPct val="104000"/>
+              </a:lnSpc>
+              <a:spcAft>
+                <a:spcPts val="400"/>
+              </a:spcAft>
+            </a:pPr>
+            <a:r>
+              <a:rPr sz="1300" b="0" i="0">
+                <a:solidFill>
+                  <a:srgbClr val="00FF88"/>
+                </a:solidFill>
+                <a:latin typeface="Segoe UI"/>
+              </a:rPr>
+              <a:t>• </a:t>
+            </a:r>
+            <a:r>
+              <a:rPr sz="1300" b="0" i="0">
+                <a:solidFill>
+                  <a:srgbClr val="9BB1CA"/>
+                </a:solidFill>
+                <a:latin typeface="Segoe UI"/>
+              </a:rPr>
+              <a:t>Refino de responsividade mobile</a:t>
+            </a:r>
+          </a:p>
+          <a:p>
+            <a:pPr>
+              <a:lnSpc>
+                <a:spcPct val="104000"/>
+              </a:lnSpc>
+              <a:spcAft>
+                <a:spcPts val="400"/>
+              </a:spcAft>
+            </a:pPr>
+            <a:r>
+              <a:rPr sz="1300" b="0" i="0">
+                <a:solidFill>
+                  <a:srgbClr val="00FF88"/>
+                </a:solidFill>
+                <a:latin typeface="Segoe UI"/>
+              </a:rPr>
+              <a:t>• </a:t>
+            </a:r>
+            <a:r>
+              <a:rPr sz="1300" b="0" i="0">
+                <a:solidFill>
+                  <a:srgbClr val="9BB1CA"/>
+                </a:solidFill>
+                <a:latin typeface="Segoe UI"/>
+              </a:rPr>
+              <a:t>Mais cobertura de testes</a:t>
+            </a:r>
+          </a:p>
+          <a:p>
+            <a:pPr>
+              <a:lnSpc>
+                <a:spcPct val="104000"/>
+              </a:lnSpc>
+              <a:spcAft>
+                <a:spcPts val="400"/>
+              </a:spcAft>
+            </a:pPr>
+            <a:r>
+              <a:rPr sz="1300" b="0" i="0">
+                <a:solidFill>
+                  <a:srgbClr val="00FF88"/>
+                </a:solidFill>
+                <a:latin typeface="Segoe UI"/>
+              </a:rPr>
+              <a:t>• </a:t>
+            </a:r>
+            <a:r>
+              <a:rPr sz="1300" b="0" i="0">
+                <a:solidFill>
+                  <a:srgbClr val="9BB1CA"/>
+                </a:solidFill>
+                <a:latin typeface="Segoe UI"/>
+              </a:rPr>
+              <a:t>Painel admin de moderação</a:t>
+            </a:r>
+          </a:p>
+          <a:p>
+            <a:pPr>
+              <a:lnSpc>
+                <a:spcPct val="104000"/>
+              </a:lnSpc>
+              <a:spcAft>
+                <a:spcPts val="400"/>
+              </a:spcAft>
+            </a:pPr>
+            <a:r>
+              <a:rPr sz="1300" b="0" i="0">
+                <a:solidFill>
+                  <a:srgbClr val="00FF88"/>
+                </a:solidFill>
+                <a:latin typeface="Segoe UI"/>
+              </a:rPr>
+              <a:t>• </a:t>
+            </a:r>
+            <a:r>
+              <a:rPr sz="1300" b="0" i="0">
+                <a:solidFill>
+                  <a:srgbClr val="9BB1CA"/>
+                </a:solidFill>
+                <a:latin typeface="Segoe UI"/>
+              </a:rPr>
+              <a:t>Acessibilidade</a:t>
+            </a:r>
+          </a:p>
+        </p:txBody>
+      </p:sp>
+      <p:sp>
+        <p:nvSpPr>
+          <p:cNvPr id="16" name="TextBox 15"/>
+          <p:cNvSpPr txBox="1"/>
+          <p:nvPr/>
+        </p:nvSpPr>
+        <p:spPr>
+          <a:xfrm>
+            <a:off x="502920" y="6446520"/>
+            <a:ext cx="11155680" cy="320040"/>
+          </a:xfrm>
+          <a:prstGeom prst="rect">
+            <a:avLst/>
+          </a:prstGeom>
+          <a:noFill/>
+        </p:spPr>
+        <p:txBody>
+          <a:bodyPr wrap="square" anchor="ctr" lIns="73152" rIns="73152" tIns="36576" bIns="36576">
+            <a:spAutoFit/>
+          </a:bodyPr>
+          <a:lstStyle/>
+          <a:p>
+            <a:r>
+              <a:rPr sz="900" b="1" i="0">
+                <a:solidFill>
+                  <a:srgbClr val="3AF6FF"/>
+                </a:solidFill>
+                <a:latin typeface="Segoe UI"/>
+              </a:rPr>
+              <a:t>Tech Hub</a:t>
+            </a:r>
+            <a:r>
+              <a:rPr sz="900" b="0" i="0">
+                <a:solidFill>
+                  <a:srgbClr val="6B7A99"/>
+                </a:solidFill>
+                <a:latin typeface="Segoe UI"/>
+              </a:rPr>
+              <a:t>  ·  Marketplace de Tecnologia  ·  Programação Back-End</a:t>
+            </a:r>
+          </a:p>
+        </p:txBody>
+      </p:sp>
+      <p:sp>
+        <p:nvSpPr>
+          <p:cNvPr id="17" name="TextBox 16"/>
+          <p:cNvSpPr txBox="1"/>
+          <p:nvPr/>
+        </p:nvSpPr>
+        <p:spPr>
+          <a:xfrm>
+            <a:off x="10789920" y="6446520"/>
+            <a:ext cx="914400" cy="320040"/>
+          </a:xfrm>
+          <a:prstGeom prst="rect">
+            <a:avLst/>
+          </a:prstGeom>
+          <a:noFill/>
+        </p:spPr>
+        <p:txBody>
+          <a:bodyPr wrap="square" anchor="ctr" lIns="73152" rIns="73152" tIns="36576" bIns="36576">
+            <a:spAutoFit/>
+          </a:bodyPr>
+          <a:lstStyle/>
+          <a:p>
+            <a:pPr algn="r"/>
+            <a:r>
+              <a:rPr sz="900" b="0" i="0">
+                <a:solidFill>
+                  <a:srgbClr val="6B7A99"/>
+                </a:solidFill>
+                <a:latin typeface="Segoe UI"/>
+              </a:rPr>
+              <a:t>13</a:t>
+            </a:r>
+          </a:p>
+        </p:txBody>
+      </p:sp>
+    </p:spTree>
+  </p:cSld>
+  <p:clrMapOvr>
+    <a:masterClrMapping/>
+  </p:clrMapOvr>
+</p:sld>
+</file>
+
+<file path=ppt/slides/slide14.xml><?xml version="1.0" encoding="utf-8"?>
+<p:sld xmlns:a="http://schemas.openxmlformats.org/drawingml/2006/main" xmlns:p="http://schemas.openxmlformats.org/presentationml/2006/main" xmlns:r="http://schemas.openxmlformats.org/officeDocument/2006/relationships">
+  <p:cSld>
+    <p:bg>
+      <p:bgPr>
+        <a:solidFill>
+          <a:srgbClr val="041123"/>
+        </a:solidFill>
+        <a:effectLst/>
+      </p:bgPr>
+    </p:bg>
+    <p:spTree>
+      <p:nvGrpSpPr>
+        <p:cNvPr id="1" name=""/>
+        <p:cNvGrpSpPr/>
+        <p:nvPr/>
+      </p:nvGrpSpPr>
+      <p:grpSpPr/>
+      <p:sp>
+        <p:nvSpPr>
+          <p:cNvPr id="2" name="Rectangle 1"/>
+          <p:cNvSpPr/>
+          <p:nvPr/>
+        </p:nvSpPr>
+        <p:spPr>
+          <a:xfrm>
+            <a:off x="8869680" y="2743200"/>
+            <a:ext cx="4572000" cy="4572000"/>
+          </a:xfrm>
+          <a:prstGeom prst="rect">
+            <a:avLst/>
+          </a:prstGeom>
+          <a:solidFill>
+            <a:srgbClr val="081D3D"/>
+          </a:solidFill>
+          <a:ln>
+            <a:noFill/>
+          </a:ln>
+          <a:effectLst/>
+        </p:spPr>
+        <p:style>
+          <a:lnRef idx="1">
+            <a:schemeClr val="accent1"/>
+          </a:lnRef>
+          <a:fillRef idx="3">
+            <a:schemeClr val="accent1"/>
+          </a:fillRef>
+          <a:effectRef idx="2">
+            <a:schemeClr val="accent1"/>
+          </a:effectRef>
+          <a:fontRef idx="minor">
+            <a:schemeClr val="lt1"/>
+          </a:fontRef>
+        </p:style>
+        <p:txBody>
+          <a:bodyPr rtlCol="0" anchor="ctr"/>
+          <a:lstStyle/>
+          <a:p>
+            <a:pPr algn="ctr"/>
+          </a:p>
+        </p:txBody>
+      </p:sp>
+      <p:sp>
+        <p:nvSpPr>
+          <p:cNvPr id="3" name="Rectangle 2"/>
+          <p:cNvSpPr/>
+          <p:nvPr/>
+        </p:nvSpPr>
+        <p:spPr>
+          <a:xfrm>
+            <a:off x="0" y="0"/>
+            <a:ext cx="12191695" cy="91440"/>
+          </a:xfrm>
+          <a:prstGeom prst="rect">
+            <a:avLst/>
+          </a:prstGeom>
+          <a:gradFill>
+            <a:gsLst>
+              <a:gs pos="0">
+                <a:srgbClr val="3AF6FF"/>
+              </a:gs>
+              <a:gs pos="100000">
+                <a:srgbClr val="0FA7FF"/>
+              </a:gs>
+            </a:gsLst>
+            <a:lin ang="0" scaled="1"/>
+          </a:gradFill>
+          <a:ln>
+            <a:noFill/>
+          </a:ln>
+          <a:effectLst/>
+        </p:spPr>
+        <p:style>
+          <a:lnRef idx="1">
+            <a:schemeClr val="accent1"/>
+          </a:lnRef>
+          <a:fillRef idx="3">
+            <a:schemeClr val="accent1"/>
+          </a:fillRef>
+          <a:effectRef idx="2">
+            <a:schemeClr val="accent1"/>
+          </a:effectRef>
+          <a:fontRef idx="minor">
+            <a:schemeClr val="lt1"/>
+          </a:fontRef>
+        </p:style>
+        <p:txBody>
+          <a:bodyPr rtlCol="0" anchor="ctr"/>
+          <a:lstStyle/>
+          <a:p>
+            <a:pPr algn="ctr"/>
+          </a:p>
+        </p:txBody>
+      </p:sp>
+      <p:sp>
+        <p:nvSpPr>
+          <p:cNvPr id="4" name="TextBox 3"/>
+          <p:cNvSpPr txBox="1"/>
+          <p:nvPr/>
+        </p:nvSpPr>
+        <p:spPr>
+          <a:xfrm>
+            <a:off x="731520" y="2377440"/>
+            <a:ext cx="10515600" cy="2377440"/>
+          </a:xfrm>
+          <a:prstGeom prst="rect">
+            <a:avLst/>
+          </a:prstGeom>
+          <a:noFill/>
+        </p:spPr>
+        <p:txBody>
+          <a:bodyPr wrap="square" anchor="t" lIns="73152" rIns="73152" tIns="36576" bIns="36576">
+            <a:spAutoFit/>
+          </a:bodyPr>
+          <a:lstStyle/>
+          <a:p>
             <a:r>
               <a:rPr sz="4800" b="1" i="0">
                 <a:solidFill>
@@ -5553,7 +7339,7 @@
                 </a:solidFill>
                 <a:latin typeface="Segoe UI"/>
               </a:rPr>
-              <a:t>12</a:t>
+              <a:t>14</a:t>
             </a:r>
           </a:p>
         </p:txBody>
@@ -9353,7 +11139,7 @@
                 </a:solidFill>
                 <a:latin typeface="Segoe UI"/>
               </a:rPr>
-              <a:t>Identidade</a:t>
+              <a:t>Identidade &amp; lojas</a:t>
             </a:r>
           </a:p>
           <a:p>
@@ -9366,7 +11152,7 @@
               </a:spcAft>
             </a:pPr>
             <a:r>
-              <a:rPr sz="1300" b="1" i="0">
+              <a:rPr sz="1250" b="1" i="0">
                 <a:solidFill>
                   <a:srgbClr val="3AF6FF"/>
                 </a:solidFill>
@@ -9375,13 +11161,13 @@
               <a:t>User  </a:t>
             </a:r>
             <a:r>
-              <a:rPr sz="1300" b="0" i="0">
+              <a:rPr sz="1250" b="0" i="0">
                 <a:solidFill>
                   <a:srgbClr val="9BB1CA"/>
                 </a:solidFill>
                 <a:latin typeface="Segoe UI"/>
               </a:rPr>
-              <a:t>AbstractUser + is_store</a:t>
+              <a:t>AbstractUser, is_store, strikes</a:t>
             </a:r>
           </a:p>
           <a:p>
@@ -9394,7 +11180,7 @@
               </a:spcAft>
             </a:pPr>
             <a:r>
-              <a:rPr sz="1300" b="1" i="0">
+              <a:rPr sz="1250" b="1" i="0">
                 <a:solidFill>
                   <a:srgbClr val="3AF6FF"/>
                 </a:solidFill>
@@ -9403,7 +11189,7 @@
               <a:t>CommonProfile  </a:t>
             </a:r>
             <a:r>
-              <a:rPr sz="1300" b="0" i="0">
+              <a:rPr sz="1250" b="0" i="0">
                 <a:solidFill>
                   <a:srgbClr val="9BB1CA"/>
                 </a:solidFill>
@@ -9422,7 +11208,7 @@
               </a:spcAft>
             </a:pPr>
             <a:r>
-              <a:rPr sz="1300" b="1" i="0">
+              <a:rPr sz="1250" b="1" i="0">
                 <a:solidFill>
                   <a:srgbClr val="3AF6FF"/>
                 </a:solidFill>
@@ -9431,13 +11217,13 @@
               <a:t>StoreProfile  </a:t>
             </a:r>
             <a:r>
-              <a:rPr sz="1300" b="0" i="0">
+              <a:rPr sz="1250" b="0" i="0">
                 <a:solidFill>
                   <a:srgbClr val="9BB1CA"/>
                 </a:solidFill>
                 <a:latin typeface="Segoe UI"/>
               </a:rPr>
-              <a:t>CNPJ, razão social, selo</a:t>
+              <a:t>CNPJ, selo, banner, descrição</a:t>
             </a:r>
           </a:p>
           <a:p>
@@ -9450,16 +11236,72 @@
               </a:spcAft>
             </a:pPr>
             <a:r>
-              <a:rPr sz="1300" b="1" i="0">
+              <a:rPr sz="1250" b="1" i="0">
                 <a:solidFill>
                   <a:srgbClr val="3AF6FF"/>
                 </a:solidFill>
                 <a:latin typeface="Segoe UI"/>
               </a:rPr>
+              <a:t>StoreVerification  </a:t>
+            </a:r>
+            <a:r>
+              <a:rPr sz="1250" b="0" i="0">
+                <a:solidFill>
+                  <a:srgbClr val="9BB1CA"/>
+                </a:solidFill>
+                <a:latin typeface="Segoe UI"/>
+              </a:rPr>
+              <a:t>pedido de selo + documento</a:t>
+            </a:r>
+          </a:p>
+          <a:p>
+            <a:pPr>
+              <a:lnSpc>
+                <a:spcPct val="104000"/>
+              </a:lnSpc>
+              <a:spcAft>
+                <a:spcPts val="400"/>
+              </a:spcAft>
+            </a:pPr>
+            <a:r>
+              <a:rPr sz="1250" b="1" i="0">
+                <a:solidFill>
+                  <a:srgbClr val="3AF6FF"/>
+                </a:solidFill>
+                <a:latin typeface="Segoe UI"/>
+              </a:rPr>
+              <a:t>Address  </a:t>
+            </a:r>
+            <a:r>
+              <a:rPr sz="1250" b="0" i="0">
+                <a:solidFill>
+                  <a:srgbClr val="9BB1CA"/>
+                </a:solidFill>
+                <a:latin typeface="Segoe UI"/>
+              </a:rPr>
+              <a:t>livro de endereços</a:t>
+            </a:r>
+          </a:p>
+          <a:p>
+            <a:pPr>
+              <a:lnSpc>
+                <a:spcPct val="104000"/>
+              </a:lnSpc>
+              <a:spcAft>
+                <a:spcPts val="400"/>
+              </a:spcAft>
+            </a:pPr>
+            <a:r>
+              <a:rPr sz="1250" b="1" i="0">
+                <a:solidFill>
+                  <a:srgbClr val="3AF6FF"/>
+                </a:solidFill>
+                <a:latin typeface="Segoe UI"/>
+              </a:rPr>
               <a:t>Category  </a:t>
             </a:r>
             <a:r>
-              <a:rPr sz="1300" b="0" i="0">
+              <a:rPr sz="1250" b="0" i="0">
                 <a:solidFill>
                   <a:srgbClr val="9BB1CA"/>
                 </a:solidFill>
@@ -9607,7 +11449,7 @@
               </a:spcAft>
             </a:pPr>
             <a:r>
-              <a:rPr sz="1300" b="1" i="0">
+              <a:rPr sz="1250" b="1" i="0">
                 <a:solidFill>
                   <a:srgbClr val="0FA7FF"/>
                 </a:solidFill>
@@ -9616,13 +11458,13 @@
               <a:t>Listing  </a:t>
             </a:r>
             <a:r>
-              <a:rPr sz="1300" b="0" i="0">
+              <a:rPr sz="1250" b="0" i="0">
                 <a:solidFill>
                   <a:srgbClr val="9BB1CA"/>
                 </a:solidFill>
                 <a:latin typeface="Segoe UI"/>
               </a:rPr>
-              <a:t>anúncio: venda/troca</a:t>
+              <a:t>anúncio: venda/troca + estoque</a:t>
             </a:r>
           </a:p>
           <a:p>
@@ -9635,7 +11477,7 @@
               </a:spcAft>
             </a:pPr>
             <a:r>
-              <a:rPr sz="1300" b="1" i="0">
+              <a:rPr sz="1250" b="1" i="0">
                 <a:solidFill>
                   <a:srgbClr val="0FA7FF"/>
                 </a:solidFill>
@@ -9644,7 +11486,7 @@
               <a:t>ListingImage  </a:t>
             </a:r>
             <a:r>
-              <a:rPr sz="1300" b="0" i="0">
+              <a:rPr sz="1250" b="0" i="0">
                 <a:solidFill>
                   <a:srgbClr val="9BB1CA"/>
                 </a:solidFill>
@@ -9663,7 +11505,7 @@
               </a:spcAft>
             </a:pPr>
             <a:r>
-              <a:rPr sz="1300" b="1" i="0">
+              <a:rPr sz="1250" b="1" i="0">
                 <a:solidFill>
                   <a:srgbClr val="0FA7FF"/>
                 </a:solidFill>
@@ -9672,13 +11514,13 @@
               <a:t>Comment  </a:t>
             </a:r>
             <a:r>
-              <a:rPr sz="1300" b="0" i="0">
+              <a:rPr sz="1250" b="0" i="0">
                 <a:solidFill>
                   <a:srgbClr val="9BB1CA"/>
                 </a:solidFill>
                 <a:latin typeface="Segoe UI"/>
               </a:rPr>
-              <a:t>comentários aninhados</a:t>
+              <a:t>comentários com respostas</a:t>
             </a:r>
           </a:p>
           <a:p>
@@ -9691,7 +11533,7 @@
               </a:spcAft>
             </a:pPr>
             <a:r>
-              <a:rPr sz="1300" b="1" i="0">
+              <a:rPr sz="1250" b="1" i="0">
                 <a:solidFill>
                   <a:srgbClr val="0FA7FF"/>
                 </a:solidFill>
@@ -9700,7 +11542,7 @@
               <a:t>Cart / CartItem  </a:t>
             </a:r>
             <a:r>
-              <a:rPr sz="1300" b="0" i="0">
+              <a:rPr sz="1250" b="0" i="0">
                 <a:solidFill>
                   <a:srgbClr val="9BB1CA"/>
                 </a:solidFill>
@@ -9719,7 +11561,7 @@
               </a:spcAft>
             </a:pPr>
             <a:r>
-              <a:rPr sz="1300" b="1" i="0">
+              <a:rPr sz="1250" b="1" i="0">
                 <a:solidFill>
                   <a:srgbClr val="0FA7FF"/>
                 </a:solidFill>
@@ -9728,13 +11570,13 @@
               <a:t>Order / OrderItem  </a:t>
             </a:r>
             <a:r>
-              <a:rPr sz="1300" b="0" i="0">
+              <a:rPr sz="1250" b="0" i="0">
                 <a:solidFill>
                   <a:srgbClr val="9BB1CA"/>
                 </a:solidFill>
                 <a:latin typeface="Segoe UI"/>
               </a:rPr>
-              <a:t>pedido + snapshots</a:t>
+              <a:t>pedido + envio/recebimento</a:t>
             </a:r>
           </a:p>
           <a:p>
@@ -9747,7 +11589,7 @@
               </a:spcAft>
             </a:pPr>
             <a:r>
-              <a:rPr sz="1300" b="1" i="0">
+              <a:rPr sz="1250" b="1" i="0">
                 <a:solidFill>
                   <a:srgbClr val="0FA7FF"/>
                 </a:solidFill>
@@ -9756,13 +11598,13 @@
               <a:t>Payment / Delivery  </a:t>
             </a:r>
             <a:r>
-              <a:rPr sz="1300" b="0" i="0">
+              <a:rPr sz="1250" b="0" i="0">
                 <a:solidFill>
                   <a:srgbClr val="9BB1CA"/>
                 </a:solidFill>
                 <a:latin typeface="Segoe UI"/>
               </a:rPr>
-              <a:t>pagamento e entrega</a:t>
+              <a:t>pagamento e frete</a:t>
             </a:r>
           </a:p>
         </p:txBody>
@@ -9891,7 +11733,7 @@
                 </a:solidFill>
                 <a:latin typeface="Segoe UI"/>
               </a:rPr>
-              <a:t>Negociação de troca</a:t>
+              <a:t>Troca, avisos &amp; moderação</a:t>
             </a:r>
           </a:p>
           <a:p>
@@ -9904,22 +11746,22 @@
               </a:spcAft>
             </a:pPr>
             <a:r>
-              <a:rPr sz="1300" b="1" i="0">
+              <a:rPr sz="1250" b="1" i="0">
                 <a:solidFill>
                   <a:srgbClr val="00FF88"/>
                 </a:solidFill>
                 <a:latin typeface="Segoe UI"/>
               </a:rPr>
-              <a:t>TradeRequest  </a:t>
-            </a:r>
-            <a:r>
-              <a:rPr sz="1300" b="0" i="0">
+              <a:t>TradeRequest / Proposal  </a:t>
+            </a:r>
+            <a:r>
+              <a:rPr sz="1250" b="0" i="0">
                 <a:solidFill>
                   <a:srgbClr val="9BB1CA"/>
                 </a:solidFill>
                 <a:latin typeface="Segoe UI"/>
               </a:rPr>
-              <a:t>negociação</a:t>
+              <a:t>negociação + quem paga</a:t>
             </a:r>
           </a:p>
           <a:p>
@@ -9932,22 +11774,22 @@
               </a:spcAft>
             </a:pPr>
             <a:r>
-              <a:rPr sz="1300" b="1" i="0">
+              <a:rPr sz="1250" b="1" i="0">
                 <a:solidFill>
                   <a:srgbClr val="00FF88"/>
                 </a:solidFill>
                 <a:latin typeface="Segoe UI"/>
               </a:rPr>
-              <a:t>TradeProposal  </a:t>
-            </a:r>
-            <a:r>
-              <a:rPr sz="1300" b="0" i="0">
+              <a:t>TradeFulfillment  </a:t>
+            </a:r>
+            <a:r>
+              <a:rPr sz="1250" b="0" i="0">
                 <a:solidFill>
                   <a:srgbClr val="9BB1CA"/>
                 </a:solidFill>
                 <a:latin typeface="Segoe UI"/>
               </a:rPr>
-              <a:t>proposta + dinheiro</a:t>
+              <a:t>acordo/execução</a:t>
             </a:r>
           </a:p>
           <a:p>
@@ -9960,22 +11802,22 @@
               </a:spcAft>
             </a:pPr>
             <a:r>
-              <a:rPr sz="1300" b="1" i="0">
+              <a:rPr sz="1250" b="1" i="0">
                 <a:solidFill>
                   <a:srgbClr val="00FF88"/>
                 </a:solidFill>
                 <a:latin typeface="Segoe UI"/>
               </a:rPr>
-              <a:t>TradeProposalImage  </a:t>
-            </a:r>
-            <a:r>
-              <a:rPr sz="1300" b="0" i="0">
+              <a:t>TradeDelivery  </a:t>
+            </a:r>
+            <a:r>
+              <a:rPr sz="1250" b="0" i="0">
                 <a:solidFill>
                   <a:srgbClr val="9BB1CA"/>
                 </a:solidFill>
                 <a:latin typeface="Segoe UI"/>
               </a:rPr>
-              <a:t>fotos da proposta</a:t>
+              <a:t>entrega dos 2 lados</a:t>
             </a:r>
           </a:p>
           <a:p>
@@ -9988,22 +11830,22 @@
               </a:spcAft>
             </a:pPr>
             <a:r>
-              <a:rPr sz="1300" b="1" i="0">
+              <a:rPr sz="1250" b="1" i="0">
                 <a:solidFill>
                   <a:srgbClr val="00FF88"/>
                 </a:solidFill>
                 <a:latin typeface="Segoe UI"/>
               </a:rPr>
-              <a:t>TradeMessage  </a:t>
-            </a:r>
-            <a:r>
-              <a:rPr sz="1300" b="0" i="0">
+              <a:t>Notification  </a:t>
+            </a:r>
+            <a:r>
+              <a:rPr sz="1250" b="0" i="0">
                 <a:solidFill>
                   <a:srgbClr val="9BB1CA"/>
                 </a:solidFill>
                 <a:latin typeface="Segoe UI"/>
               </a:rPr>
-              <a:t>mensagens</a:t>
+              <a:t>avisos em tempo real</a:t>
             </a:r>
           </a:p>
           <a:p>
@@ -10016,50 +11858,22 @@
               </a:spcAft>
             </a:pPr>
             <a:r>
-              <a:rPr sz="1300" b="1" i="0">
+              <a:rPr sz="1250" b="1" i="0">
                 <a:solidFill>
                   <a:srgbClr val="00FF88"/>
                 </a:solidFill>
                 <a:latin typeface="Segoe UI"/>
               </a:rPr>
-              <a:t>TradeFulfillment  </a:t>
-            </a:r>
-            <a:r>
-              <a:rPr sz="1300" b="0" i="0">
+              <a:t>ListingReport  </a:t>
+            </a:r>
+            <a:r>
+              <a:rPr sz="1250" b="0" i="0">
                 <a:solidFill>
                   <a:srgbClr val="9BB1CA"/>
                 </a:solidFill>
                 <a:latin typeface="Segoe UI"/>
               </a:rPr>
-              <a:t>execução/acordo</a:t>
-            </a:r>
-          </a:p>
-          <a:p>
-            <a:pPr>
-              <a:lnSpc>
-                <a:spcPct val="104000"/>
-              </a:lnSpc>
-              <a:spcAft>
-                <a:spcPts val="400"/>
-              </a:spcAft>
-            </a:pPr>
-            <a:r>
-              <a:rPr sz="1300" b="1" i="0">
-                <a:solidFill>
-                  <a:srgbClr val="00FF88"/>
-                </a:solidFill>
-                <a:latin typeface="Segoe UI"/>
-              </a:rPr>
-              <a:t>TradeDelivery  </a:t>
-            </a:r>
-            <a:r>
-              <a:rPr sz="1300" b="0" i="0">
-                <a:solidFill>
-                  <a:srgbClr val="9BB1CA"/>
-                </a:solidFill>
-                <a:latin typeface="Segoe UI"/>
-              </a:rPr>
-              <a:t>entrega dos 2 lados</a:t>
+              <a:t>denúncias de anúncio</a:t>
             </a:r>
           </a:p>
         </p:txBody>
@@ -12306,7 +14120,7 @@
             <a:avLst/>
           </a:prstGeom>
           <a:solidFill>
-            <a:srgbClr val="E04F5F"/>
+            <a:srgbClr val="0FA7FF"/>
           </a:solidFill>
           <a:ln>
             <a:noFill/>
@@ -12360,11 +14174,11 @@
             <a:r>
               <a:rPr sz="1100" b="1" i="0">
                 <a:solidFill>
-                  <a:srgbClr val="E04F5F"/>
-                </a:solidFill>
-                <a:latin typeface="Segoe UI"/>
-              </a:rPr>
-              <a:t>QUALIDADE &amp; SEGURANÇA</a:t>
+                  <a:srgbClr val="0FA7FF"/>
+                </a:solidFill>
+                <a:latin typeface="Segoe UI"/>
+              </a:rPr>
+              <a:t>2 · DEMONSTRAÇÃO</a:t>
             </a:r>
           </a:p>
           <a:p>
@@ -12375,7 +14189,7 @@
                 </a:solidFill>
                 <a:latin typeface="Segoe UI"/>
               </a:rPr>
-              <a:t>Validações, testes e proteção</a:t>
+              <a:t>Uma plataforma completa</a:t>
             </a:r>
           </a:p>
         </p:txBody>
@@ -12410,7 +14224,7 @@
                 </a:solidFill>
                 <a:latin typeface="Segoe UI"/>
               </a:rPr>
-              <a:t>RNF + Etapa 6</a:t>
+              <a:t>Pós-MVP</a:t>
             </a:r>
           </a:p>
         </p:txBody>
@@ -12424,7 +14238,7 @@
         <p:spPr>
           <a:xfrm>
             <a:off x="548640" y="2011680"/>
-            <a:ext cx="3566160" cy="4023360"/>
+            <a:ext cx="2670048" cy="4023360"/>
           </a:xfrm>
           <a:prstGeom prst="roundRect">
             <a:avLst/>
@@ -12470,7 +14284,7 @@
         <p:spPr>
           <a:xfrm>
             <a:off x="548640" y="2011680"/>
-            <a:ext cx="3566160" cy="82296"/>
+            <a:ext cx="2670048" cy="82296"/>
           </a:xfrm>
           <a:prstGeom prst="rect">
             <a:avLst/>
@@ -12514,7 +14328,7 @@
         <p:spPr>
           <a:xfrm>
             <a:off x="749808" y="2194560"/>
-            <a:ext cx="3163824" cy="3694176"/>
+            <a:ext cx="2267712" cy="3694176"/>
           </a:xfrm>
           <a:prstGeom prst="rect">
             <a:avLst/>
@@ -12539,7 +14353,7 @@
                 </a:solidFill>
                 <a:latin typeface="Segoe UI"/>
               </a:rPr>
-              <a:t>Validações de regra</a:t>
+              <a:t>🔔  Notificações</a:t>
             </a:r>
           </a:p>
           <a:p>
@@ -12552,7 +14366,7 @@
               </a:spcAft>
             </a:pPr>
             <a:r>
-              <a:rPr sz="1250" b="0" i="0">
+              <a:rPr sz="1200" b="0" i="0">
                 <a:solidFill>
                   <a:srgbClr val="3AF6FF"/>
                 </a:solidFill>
@@ -12561,13 +14375,13 @@
               <a:t>• </a:t>
             </a:r>
             <a:r>
-              <a:rPr sz="1250" b="0" i="0">
+              <a:rPr sz="1200" b="0" i="0">
                 <a:solidFill>
                   <a:srgbClr val="9BB1CA"/>
                 </a:solidFill>
                 <a:latin typeface="Segoe UI"/>
               </a:rPr>
-              <a:t>CPF e CNPJ com dígito verificador</a:t>
+              <a:t>Avisos de venda, compra, troca e comentário</a:t>
             </a:r>
           </a:p>
           <a:p>
@@ -12580,7 +14394,7 @@
               </a:spcAft>
             </a:pPr>
             <a:r>
-              <a:rPr sz="1250" b="0" i="0">
+              <a:rPr sz="1200" b="0" i="0">
                 <a:solidFill>
                   <a:srgbClr val="3AF6FF"/>
                 </a:solidFill>
@@ -12589,13 +14403,13 @@
               <a:t>• </a:t>
             </a:r>
             <a:r>
-              <a:rPr sz="1250" b="0" i="0">
+              <a:rPr sz="1200" b="0" i="0">
                 <a:solidFill>
                   <a:srgbClr val="9BB1CA"/>
                 </a:solidFill>
                 <a:latin typeface="Segoe UI"/>
               </a:rPr>
-              <a:t>Documentos únicos no cadastro</a:t>
+              <a:t>Sino no header com badge</a:t>
             </a:r>
           </a:p>
           <a:p>
@@ -12608,7 +14422,7 @@
               </a:spcAft>
             </a:pPr>
             <a:r>
-              <a:rPr sz="1250" b="0" i="0">
+              <a:rPr sz="1200" b="0" i="0">
                 <a:solidFill>
                   <a:srgbClr val="3AF6FF"/>
                 </a:solidFill>
@@ -12617,13 +14431,13 @@
               <a:t>• </a:t>
             </a:r>
             <a:r>
-              <a:rPr sz="1250" b="0" i="0">
+              <a:rPr sz="1200" b="0" i="0">
                 <a:solidFill>
                   <a:srgbClr val="9BB1CA"/>
                 </a:solidFill>
                 <a:latin typeface="Segoe UI"/>
               </a:rPr>
-              <a:t>Maioridade (18+) na pessoa física</a:t>
+              <a:t>Tempo real via polling</a:t>
             </a:r>
           </a:p>
           <a:p>
@@ -12636,7 +14450,7 @@
               </a:spcAft>
             </a:pPr>
             <a:r>
-              <a:rPr sz="1250" b="0" i="0">
+              <a:rPr sz="1200" b="0" i="0">
                 <a:solidFill>
                   <a:srgbClr val="3AF6FF"/>
                 </a:solidFill>
@@ -12645,69 +14459,13 @@
               <a:t>• </a:t>
             </a:r>
             <a:r>
-              <a:rPr sz="1250" b="0" i="0">
+              <a:rPr sz="1200" b="0" i="0">
                 <a:solidFill>
                   <a:srgbClr val="9BB1CA"/>
                 </a:solidFill>
                 <a:latin typeface="Segoe UI"/>
               </a:rPr>
-              <a:t>Loja não cria troca / só produto novo</a:t>
-            </a:r>
-          </a:p>
-          <a:p>
-            <a:pPr>
-              <a:lnSpc>
-                <a:spcPct val="104000"/>
-              </a:lnSpc>
-              <a:spcAft>
-                <a:spcPts val="400"/>
-              </a:spcAft>
-            </a:pPr>
-            <a:r>
-              <a:rPr sz="1250" b="0" i="0">
-                <a:solidFill>
-                  <a:srgbClr val="3AF6FF"/>
-                </a:solidFill>
-                <a:latin typeface="Segoe UI"/>
-              </a:rPr>
-              <a:t>• </a:t>
-            </a:r>
-            <a:r>
-              <a:rPr sz="1250" b="0" i="0">
-                <a:solidFill>
-                  <a:srgbClr val="9BB1CA"/>
-                </a:solidFill>
-                <a:latin typeface="Segoe UI"/>
-              </a:rPr>
-              <a:t>Não adicionar o próprio anúncio ao carrinho</a:t>
-            </a:r>
-          </a:p>
-          <a:p>
-            <a:pPr>
-              <a:lnSpc>
-                <a:spcPct val="104000"/>
-              </a:lnSpc>
-              <a:spcAft>
-                <a:spcPts val="400"/>
-              </a:spcAft>
-            </a:pPr>
-            <a:r>
-              <a:rPr sz="1250" b="0" i="0">
-                <a:solidFill>
-                  <a:srgbClr val="3AF6FF"/>
-                </a:solidFill>
-                <a:latin typeface="Segoe UI"/>
-              </a:rPr>
-              <a:t>• </a:t>
-            </a:r>
-            <a:r>
-              <a:rPr sz="1250" b="0" i="0">
-                <a:solidFill>
-                  <a:srgbClr val="9BB1CA"/>
-                </a:solidFill>
-                <a:latin typeface="Segoe UI"/>
-              </a:rPr>
-              <a:t>Máscaras de CPF, telefone, CEP e R$</a:t>
+              <a:t>Marcar lida + lidas/não lidas</a:t>
             </a:r>
           </a:p>
         </p:txBody>
@@ -12720,8 +14478,8 @@
         </p:nvSpPr>
         <p:spPr>
           <a:xfrm>
-            <a:off x="4315968" y="2011680"/>
-            <a:ext cx="3566160" cy="4023360"/>
+            <a:off x="3346704" y="2011680"/>
+            <a:ext cx="2670048" cy="4023360"/>
           </a:xfrm>
           <a:prstGeom prst="roundRect">
             <a:avLst/>
@@ -12766,14 +14524,14 @@
         </p:nvSpPr>
         <p:spPr>
           <a:xfrm>
-            <a:off x="4315968" y="2011680"/>
-            <a:ext cx="3566160" cy="82296"/>
+            <a:off x="3346704" y="2011680"/>
+            <a:ext cx="2670048" cy="82296"/>
           </a:xfrm>
           <a:prstGeom prst="rect">
             <a:avLst/>
           </a:prstGeom>
           <a:solidFill>
-            <a:srgbClr val="00FF88"/>
+            <a:srgbClr val="0FA7FF"/>
           </a:solidFill>
           <a:ln>
             <a:noFill/>
@@ -12810,8 +14568,8 @@
         </p:nvSpPr>
         <p:spPr>
           <a:xfrm>
-            <a:off x="4517136" y="2194560"/>
-            <a:ext cx="3163824" cy="3694176"/>
+            <a:off x="3547872" y="2194560"/>
+            <a:ext cx="2267712" cy="3694176"/>
           </a:xfrm>
           <a:prstGeom prst="rect">
             <a:avLst/>
@@ -12836,7 +14594,7 @@
                 </a:solidFill>
                 <a:latin typeface="Segoe UI"/>
               </a:rPr>
-              <a:t>Testes automatizados</a:t>
+              <a:t>📍  Endereços &amp; frete</a:t>
             </a:r>
           </a:p>
           <a:p>
@@ -12849,22 +14607,22 @@
               </a:spcAft>
             </a:pPr>
             <a:r>
-              <a:rPr sz="1250" b="0" i="0">
-                <a:solidFill>
-                  <a:srgbClr val="00FF88"/>
+              <a:rPr sz="1200" b="0" i="0">
+                <a:solidFill>
+                  <a:srgbClr val="0FA7FF"/>
                 </a:solidFill>
                 <a:latin typeface="Segoe UI"/>
               </a:rPr>
               <a:t>• </a:t>
             </a:r>
             <a:r>
-              <a:rPr sz="1250" b="0" i="0">
+              <a:rPr sz="1200" b="0" i="0">
                 <a:solidFill>
                   <a:srgbClr val="9BB1CA"/>
                 </a:solidFill>
                 <a:latin typeface="Segoe UI"/>
               </a:rPr>
-              <a:t>Cadastro de PF e PJ</a:t>
+              <a:t>Livro de endereços (CRUD)</a:t>
             </a:r>
           </a:p>
           <a:p>
@@ -12877,22 +14635,22 @@
               </a:spcAft>
             </a:pPr>
             <a:r>
-              <a:rPr sz="1250" b="0" i="0">
-                <a:solidFill>
-                  <a:srgbClr val="00FF88"/>
+              <a:rPr sz="1200" b="0" i="0">
+                <a:solidFill>
+                  <a:srgbClr val="0FA7FF"/>
                 </a:solidFill>
                 <a:latin typeface="Segoe UI"/>
               </a:rPr>
               <a:t>• </a:t>
             </a:r>
             <a:r>
-              <a:rPr sz="1250" b="0" i="0">
+              <a:rPr sz="1200" b="0" i="0">
                 <a:solidFill>
                   <a:srgbClr val="9BB1CA"/>
                 </a:solidFill>
                 <a:latin typeface="Segoe UI"/>
               </a:rPr>
-              <a:t>Fluxo de checkout e pedidos</a:t>
+              <a:t>Preenche o checkout num clique</a:t>
             </a:r>
           </a:p>
           <a:p>
@@ -12905,22 +14663,22 @@
               </a:spcAft>
             </a:pPr>
             <a:r>
-              <a:rPr sz="1250" b="0" i="0">
-                <a:solidFill>
-                  <a:srgbClr val="00FF88"/>
+              <a:rPr sz="1200" b="0" i="0">
+                <a:solidFill>
+                  <a:srgbClr val="0FA7FF"/>
                 </a:solidFill>
                 <a:latin typeface="Segoe UI"/>
               </a:rPr>
               <a:t>• </a:t>
             </a:r>
             <a:r>
-              <a:rPr sz="1250" b="0" i="0">
+              <a:rPr sz="1200" b="0" i="0">
                 <a:solidFill>
                   <a:srgbClr val="9BB1CA"/>
                 </a:solidFill>
                 <a:latin typeface="Segoe UI"/>
               </a:rPr>
-              <a:t>Fluxo completo de troca</a:t>
+              <a:t>Frete simulado por serviço</a:t>
             </a:r>
           </a:p>
           <a:p>
@@ -12933,78 +14691,22 @@
               </a:spcAft>
             </a:pPr>
             <a:r>
-              <a:rPr sz="1250" b="0" i="0">
-                <a:solidFill>
-                  <a:srgbClr val="00FF88"/>
+              <a:rPr sz="1200" b="0" i="0">
+                <a:solidFill>
+                  <a:srgbClr val="0FA7FF"/>
                 </a:solidFill>
                 <a:latin typeface="Segoe UI"/>
               </a:rPr>
               <a:t>• </a:t>
             </a:r>
             <a:r>
-              <a:rPr sz="1250" b="0" i="0">
+              <a:rPr sz="1200" b="0" i="0">
                 <a:solidFill>
                   <a:srgbClr val="9BB1CA"/>
                 </a:solidFill>
                 <a:latin typeface="Segoe UI"/>
               </a:rPr>
-              <a:t>Entrega e histórico</a:t>
-            </a:r>
-          </a:p>
-          <a:p>
-            <a:pPr>
-              <a:lnSpc>
-                <a:spcPct val="104000"/>
-              </a:lnSpc>
-              <a:spcAft>
-                <a:spcPts val="400"/>
-              </a:spcAft>
-            </a:pPr>
-            <a:r>
-              <a:rPr sz="1250" b="0" i="0">
-                <a:solidFill>
-                  <a:srgbClr val="00FF88"/>
-                </a:solidFill>
-                <a:latin typeface="Segoe UI"/>
-              </a:rPr>
-              <a:t>• </a:t>
-            </a:r>
-            <a:r>
-              <a:rPr sz="1250" b="0" i="0">
-                <a:solidFill>
-                  <a:srgbClr val="9BB1CA"/>
-                </a:solidFill>
-                <a:latin typeface="Segoe UI"/>
-              </a:rPr>
-              <a:t>Webhooks de pagamento</a:t>
-            </a:r>
-          </a:p>
-          <a:p>
-            <a:pPr>
-              <a:lnSpc>
-                <a:spcPct val="104000"/>
-              </a:lnSpc>
-              <a:spcAft>
-                <a:spcPts val="400"/>
-              </a:spcAft>
-            </a:pPr>
-            <a:r>
-              <a:rPr sz="1250" b="0" i="0">
-                <a:solidFill>
-                  <a:srgbClr val="00FF88"/>
-                </a:solidFill>
-                <a:latin typeface="Segoe UI"/>
-              </a:rPr>
-              <a:t>• </a:t>
-            </a:r>
-            <a:r>
-              <a:rPr sz="1250" b="0" i="0">
-                <a:solidFill>
-                  <a:srgbClr val="9BB1CA"/>
-                </a:solidFill>
-                <a:latin typeface="Segoe UI"/>
-              </a:rPr>
-              <a:t>Auth e regras dos models</a:t>
+              <a:t>Subtotal + frete + total ao vivo</a:t>
             </a:r>
           </a:p>
         </p:txBody>
@@ -13017,8 +14719,8 @@
         </p:nvSpPr>
         <p:spPr>
           <a:xfrm>
-            <a:off x="8083296" y="2011680"/>
-            <a:ext cx="3566160" cy="4023360"/>
+            <a:off x="6144768" y="2011680"/>
+            <a:ext cx="2670048" cy="4023360"/>
           </a:xfrm>
           <a:prstGeom prst="roundRect">
             <a:avLst/>
@@ -13063,8 +14765,8 @@
         </p:nvSpPr>
         <p:spPr>
           <a:xfrm>
-            <a:off x="8083296" y="2011680"/>
-            <a:ext cx="3566160" cy="82296"/>
+            <a:off x="6144768" y="2011680"/>
+            <a:ext cx="2670048" cy="82296"/>
           </a:xfrm>
           <a:prstGeom prst="rect">
             <a:avLst/>
@@ -13107,8 +14809,8 @@
         </p:nvSpPr>
         <p:spPr>
           <a:xfrm>
-            <a:off x="8284464" y="2194560"/>
-            <a:ext cx="3163824" cy="3694176"/>
+            <a:off x="6345936" y="2194560"/>
+            <a:ext cx="2267712" cy="3694176"/>
           </a:xfrm>
           <a:prstGeom prst="rect">
             <a:avLst/>
@@ -13133,7 +14835,7 @@
                 </a:solidFill>
                 <a:latin typeface="Segoe UI"/>
               </a:rPr>
-              <a:t>Segurança</a:t>
+              <a:t>📦  Estoque</a:t>
             </a:r>
           </a:p>
           <a:p>
@@ -13146,7 +14848,7 @@
               </a:spcAft>
             </a:pPr>
             <a:r>
-              <a:rPr sz="1250" b="0" i="0">
+              <a:rPr sz="1200" b="0" i="0">
                 <a:solidFill>
                   <a:srgbClr val="FFC107"/>
                 </a:solidFill>
@@ -13155,13 +14857,13 @@
               <a:t>• </a:t>
             </a:r>
             <a:r>
-              <a:rPr sz="1250" b="0" i="0">
+              <a:rPr sz="1200" b="0" i="0">
                 <a:solidFill>
                   <a:srgbClr val="9BB1CA"/>
                 </a:solidFill>
                 <a:latin typeface="Segoe UI"/>
               </a:rPr>
-              <a:t>Senhas validadas pelo Django</a:t>
+              <a:t>Quantidade por anúncio</a:t>
             </a:r>
           </a:p>
           <a:p>
@@ -13174,7 +14876,7 @@
               </a:spcAft>
             </a:pPr>
             <a:r>
-              <a:rPr sz="1250" b="0" i="0">
+              <a:rPr sz="1200" b="0" i="0">
                 <a:solidFill>
                   <a:srgbClr val="FFC107"/>
                 </a:solidFill>
@@ -13183,13 +14885,13 @@
               <a:t>• </a:t>
             </a:r>
             <a:r>
-              <a:rPr sz="1250" b="0" i="0">
+              <a:rPr sz="1200" b="0" i="0">
                 <a:solidFill>
                   <a:srgbClr val="9BB1CA"/>
                 </a:solidFill>
                 <a:latin typeface="Segoe UI"/>
               </a:rPr>
-              <a:t>Segredos fora do código (.env)</a:t>
+              <a:t>Baixa ao vender ou trocar</a:t>
             </a:r>
           </a:p>
           <a:p>
@@ -13202,7 +14904,7 @@
               </a:spcAft>
             </a:pPr>
             <a:r>
-              <a:rPr sz="1250" b="0" i="0">
+              <a:rPr sz="1200" b="0" i="0">
                 <a:solidFill>
                   <a:srgbClr val="FFC107"/>
                 </a:solidFill>
@@ -13211,13 +14913,13 @@
               <a:t>• </a:t>
             </a:r>
             <a:r>
-              <a:rPr sz="1250" b="0" i="0">
+              <a:rPr sz="1200" b="0" i="0">
                 <a:solidFill>
                   <a:srgbClr val="9BB1CA"/>
                 </a:solidFill>
                 <a:latin typeface="Segoe UI"/>
               </a:rPr>
-              <a:t>CSRF em todos os formulários</a:t>
+              <a:t>Esgotado automático</a:t>
             </a:r>
           </a:p>
           <a:p>
@@ -13230,7 +14932,7 @@
               </a:spcAft>
             </a:pPr>
             <a:r>
-              <a:rPr sz="1250" b="0" i="0">
+              <a:rPr sz="1200" b="0" i="0">
                 <a:solidFill>
                   <a:srgbClr val="FFC107"/>
                 </a:solidFill>
@@ -13239,13 +14941,142 @@
               <a:t>• </a:t>
             </a:r>
             <a:r>
-              <a:rPr sz="1250" b="0" i="0">
+              <a:rPr sz="1200" b="0" i="0">
                 <a:solidFill>
                   <a:srgbClr val="9BB1CA"/>
                 </a:solidFill>
                 <a:latin typeface="Segoe UI"/>
               </a:rPr>
-              <a:t>Cookies seguros + SSL em produção</a:t>
+              <a:t>Repor reativa o anúncio</a:t>
+            </a:r>
+          </a:p>
+        </p:txBody>
+      </p:sp>
+      <p:sp>
+        <p:nvSpPr>
+          <p:cNvPr id="16" name="Rounded Rectangle 15"/>
+          <p:cNvSpPr/>
+          <p:nvPr/>
+        </p:nvSpPr>
+        <p:spPr>
+          <a:xfrm>
+            <a:off x="8942832" y="2011680"/>
+            <a:ext cx="2697480" cy="4023360"/>
+          </a:xfrm>
+          <a:prstGeom prst="roundRect">
+            <a:avLst/>
+          </a:prstGeom>
+          <a:solidFill>
+            <a:srgbClr val="081D3D"/>
+          </a:solidFill>
+          <a:ln w="12700">
+            <a:solidFill>
+              <a:srgbClr val="1E3A5F"/>
+            </a:solidFill>
+          </a:ln>
+          <a:effectLst/>
+        </p:spPr>
+        <p:style>
+          <a:lnRef idx="1">
+            <a:schemeClr val="accent1"/>
+          </a:lnRef>
+          <a:fillRef idx="3">
+            <a:schemeClr val="accent1"/>
+          </a:fillRef>
+          <a:effectRef idx="2">
+            <a:schemeClr val="accent1"/>
+          </a:effectRef>
+          <a:fontRef idx="minor">
+            <a:schemeClr val="lt1"/>
+          </a:fontRef>
+        </p:style>
+        <p:txBody>
+          <a:bodyPr rtlCol="0" anchor="ctr"/>
+          <a:lstStyle/>
+          <a:p>
+            <a:pPr algn="ctr"/>
+          </a:p>
+        </p:txBody>
+      </p:sp>
+      <p:sp>
+        <p:nvSpPr>
+          <p:cNvPr id="17" name="Rectangle 16"/>
+          <p:cNvSpPr/>
+          <p:nvPr/>
+        </p:nvSpPr>
+        <p:spPr>
+          <a:xfrm>
+            <a:off x="8942832" y="2011680"/>
+            <a:ext cx="2697480" cy="82296"/>
+          </a:xfrm>
+          <a:prstGeom prst="rect">
+            <a:avLst/>
+          </a:prstGeom>
+          <a:solidFill>
+            <a:srgbClr val="00FF88"/>
+          </a:solidFill>
+          <a:ln>
+            <a:noFill/>
+          </a:ln>
+          <a:effectLst/>
+        </p:spPr>
+        <p:style>
+          <a:lnRef idx="1">
+            <a:schemeClr val="accent1"/>
+          </a:lnRef>
+          <a:fillRef idx="3">
+            <a:schemeClr val="accent1"/>
+          </a:fillRef>
+          <a:effectRef idx="2">
+            <a:schemeClr val="accent1"/>
+          </a:effectRef>
+          <a:fontRef idx="minor">
+            <a:schemeClr val="lt1"/>
+          </a:fontRef>
+        </p:style>
+        <p:txBody>
+          <a:bodyPr rtlCol="0" anchor="ctr"/>
+          <a:lstStyle/>
+          <a:p>
+            <a:pPr algn="ctr"/>
+          </a:p>
+        </p:txBody>
+      </p:sp>
+      <p:sp>
+        <p:nvSpPr>
+          <p:cNvPr id="18" name="TextBox 17"/>
+          <p:cNvSpPr txBox="1"/>
+          <p:nvPr/>
+        </p:nvSpPr>
+        <p:spPr>
+          <a:xfrm>
+            <a:off x="9144000" y="2194560"/>
+            <a:ext cx="2295144" cy="3694176"/>
+          </a:xfrm>
+          <a:prstGeom prst="rect">
+            <a:avLst/>
+          </a:prstGeom>
+          <a:noFill/>
+        </p:spPr>
+        <p:txBody>
+          <a:bodyPr wrap="square" anchor="t" lIns="73152" rIns="73152" tIns="36576" bIns="36576">
+            <a:spAutoFit/>
+          </a:bodyPr>
+          <a:lstStyle/>
+          <a:p>
+            <a:pPr>
+              <a:spcAft>
+                <a:spcPts val="700"/>
+              </a:spcAft>
+            </a:pPr>
+            <a:r>
+              <a:rPr sz="1500" b="1" i="0">
+                <a:solidFill>
+                  <a:srgbClr val="EEF7FF"/>
+                </a:solidFill>
+                <a:latin typeface="Segoe UI"/>
+              </a:rPr>
+              <a:t>💳  Financeiro</a:t>
             </a:r>
           </a:p>
           <a:p>
@@ -13258,22 +15089,22 @@
               </a:spcAft>
             </a:pPr>
             <a:r>
-              <a:rPr sz="1250" b="0" i="0">
-                <a:solidFill>
-                  <a:srgbClr val="FFC107"/>
+              <a:rPr sz="1200" b="0" i="0">
+                <a:solidFill>
+                  <a:srgbClr val="00FF88"/>
                 </a:solidFill>
                 <a:latin typeface="Segoe UI"/>
               </a:rPr>
               <a:t>• </a:t>
             </a:r>
             <a:r>
-              <a:rPr sz="1250" b="0" i="0">
+              <a:rPr sz="1200" b="0" i="0">
                 <a:solidFill>
                   <a:srgbClr val="9BB1CA"/>
                 </a:solidFill>
                 <a:latin typeface="Segoe UI"/>
               </a:rPr>
-              <a:t>HSTS e ALLOWED_HOSTS obrigatórios</a:t>
+              <a:t>Painel Gastei × Ganhei × Saldo</a:t>
             </a:r>
           </a:p>
           <a:p>
@@ -13286,29 +15117,85 @@
               </a:spcAft>
             </a:pPr>
             <a:r>
-              <a:rPr sz="1250" b="0" i="0">
-                <a:solidFill>
-                  <a:srgbClr val="FFC107"/>
+              <a:rPr sz="1200" b="0" i="0">
+                <a:solidFill>
+                  <a:srgbClr val="00FF88"/>
                 </a:solidFill>
                 <a:latin typeface="Segoe UI"/>
               </a:rPr>
               <a:t>• </a:t>
             </a:r>
             <a:r>
-              <a:rPr sz="1250" b="0" i="0">
+              <a:rPr sz="1200" b="0" i="0">
                 <a:solidFill>
                   <a:srgbClr val="9BB1CA"/>
                 </a:solidFill>
                 <a:latin typeface="Segoe UI"/>
               </a:rPr>
-              <a:t>JWT para a API REST</a:t>
-            </a:r>
-          </a:p>
-        </p:txBody>
-      </p:sp>
-      <p:sp>
-        <p:nvSpPr>
-          <p:cNvPr id="16" name="TextBox 15"/>
+              <a:t>Compras, vendas e trocas</a:t>
+            </a:r>
+          </a:p>
+          <a:p>
+            <a:pPr>
+              <a:lnSpc>
+                <a:spcPct val="104000"/>
+              </a:lnSpc>
+              <a:spcAft>
+                <a:spcPts val="400"/>
+              </a:spcAft>
+            </a:pPr>
+            <a:r>
+              <a:rPr sz="1200" b="0" i="0">
+                <a:solidFill>
+                  <a:srgbClr val="00FF88"/>
+                </a:solidFill>
+                <a:latin typeface="Segoe UI"/>
+              </a:rPr>
+              <a:t>• </a:t>
+            </a:r>
+            <a:r>
+              <a:rPr sz="1200" b="0" i="0">
+                <a:solidFill>
+                  <a:srgbClr val="9BB1CA"/>
+                </a:solidFill>
+                <a:latin typeface="Segoe UI"/>
+              </a:rPr>
+              <a:t>Cada item liga ao pedido</a:t>
+            </a:r>
+          </a:p>
+          <a:p>
+            <a:pPr>
+              <a:lnSpc>
+                <a:spcPct val="104000"/>
+              </a:lnSpc>
+              <a:spcAft>
+                <a:spcPts val="400"/>
+              </a:spcAft>
+            </a:pPr>
+            <a:r>
+              <a:rPr sz="1200" b="0" i="0">
+                <a:solidFill>
+                  <a:srgbClr val="00FF88"/>
+                </a:solidFill>
+                <a:latin typeface="Segoe UI"/>
+              </a:rPr>
+              <a:t>• </a:t>
+            </a:r>
+            <a:r>
+              <a:rPr sz="1200" b="0" i="0">
+                <a:solidFill>
+                  <a:srgbClr val="9BB1CA"/>
+                </a:solidFill>
+                <a:latin typeface="Segoe UI"/>
+              </a:rPr>
+              <a:t>Confirmação de envio e recebimento</a:t>
+            </a:r>
+          </a:p>
+        </p:txBody>
+      </p:sp>
+      <p:sp>
+        <p:nvSpPr>
+          <p:cNvPr id="19" name="TextBox 18"/>
           <p:cNvSpPr txBox="1"/>
           <p:nvPr/>
         </p:nvSpPr>
@@ -13351,7 +15238,7 @@
       </p:sp>
       <p:sp>
         <p:nvSpPr>
-          <p:cNvPr id="17" name="TextBox 16"/>
+          <p:cNvPr id="20" name="TextBox 19"/>
           <p:cNvSpPr txBox="1"/>
           <p:nvPr/>
         </p:nvSpPr>
@@ -13521,7 +15408,7 @@
             <a:avLst/>
           </a:prstGeom>
           <a:solidFill>
-            <a:srgbClr val="0FA7FF"/>
+            <a:srgbClr val="8A4FD4"/>
           </a:solidFill>
           <a:ln>
             <a:noFill/>
@@ -13575,11 +15462,11 @@
             <a:r>
               <a:rPr sz="1100" b="1" i="0">
                 <a:solidFill>
-                  <a:srgbClr val="0FA7FF"/>
-                </a:solidFill>
-                <a:latin typeface="Segoe UI"/>
-              </a:rPr>
-              <a:t>3 · DECISÕES TÉCNICAS</a:t>
+                  <a:srgbClr val="8A4FD4"/>
+                </a:solidFill>
+                <a:latin typeface="Segoe UI"/>
+              </a:rPr>
+              <a:t>DIFERENCIAIS &amp; GOVERNANÇA</a:t>
             </a:r>
           </a:p>
           <a:p>
@@ -13590,7 +15477,7 @@
                 </a:solidFill>
                 <a:latin typeface="Segoe UI"/>
               </a:rPr>
-              <a:t>Por que fizemos assim</a:t>
+              <a:t>Lojas e moderação</a:t>
             </a:r>
           </a:p>
         </p:txBody>
@@ -13625,21 +15512,111 @@
                 </a:solidFill>
                 <a:latin typeface="Segoe UI"/>
               </a:rPr>
-              <a:t>2–3 min</a:t>
-            </a:r>
-          </a:p>
-        </p:txBody>
-      </p:sp>
-      <p:sp>
-        <p:nvSpPr>
-          <p:cNvPr id="7" name="TextBox 6"/>
+              <a:t>Confiança</a:t>
+            </a:r>
+          </a:p>
+        </p:txBody>
+      </p:sp>
+      <p:sp>
+        <p:nvSpPr>
+          <p:cNvPr id="7" name="Rounded Rectangle 6"/>
+          <p:cNvSpPr/>
+          <p:nvPr/>
+        </p:nvSpPr>
+        <p:spPr>
+          <a:xfrm>
+            <a:off x="548640" y="2011680"/>
+            <a:ext cx="3566160" cy="4023360"/>
+          </a:xfrm>
+          <a:prstGeom prst="roundRect">
+            <a:avLst/>
+          </a:prstGeom>
+          <a:solidFill>
+            <a:srgbClr val="081D3D"/>
+          </a:solidFill>
+          <a:ln w="12700">
+            <a:solidFill>
+              <a:srgbClr val="1E3A5F"/>
+            </a:solidFill>
+          </a:ln>
+          <a:effectLst/>
+        </p:spPr>
+        <p:style>
+          <a:lnRef idx="1">
+            <a:schemeClr val="accent1"/>
+          </a:lnRef>
+          <a:fillRef idx="3">
+            <a:schemeClr val="accent1"/>
+          </a:fillRef>
+          <a:effectRef idx="2">
+            <a:schemeClr val="accent1"/>
+          </a:effectRef>
+          <a:fontRef idx="minor">
+            <a:schemeClr val="lt1"/>
+          </a:fontRef>
+        </p:style>
+        <p:txBody>
+          <a:bodyPr rtlCol="0" anchor="ctr"/>
+          <a:lstStyle/>
+          <a:p>
+            <a:pPr algn="ctr"/>
+          </a:p>
+        </p:txBody>
+      </p:sp>
+      <p:sp>
+        <p:nvSpPr>
+          <p:cNvPr id="8" name="Rectangle 7"/>
+          <p:cNvSpPr/>
+          <p:nvPr/>
+        </p:nvSpPr>
+        <p:spPr>
+          <a:xfrm>
+            <a:off x="548640" y="2011680"/>
+            <a:ext cx="3566160" cy="82296"/>
+          </a:xfrm>
+          <a:prstGeom prst="rect">
+            <a:avLst/>
+          </a:prstGeom>
+          <a:solidFill>
+            <a:srgbClr val="3AF6FF"/>
+          </a:solidFill>
+          <a:ln>
+            <a:noFill/>
+          </a:ln>
+          <a:effectLst/>
+        </p:spPr>
+        <p:style>
+          <a:lnRef idx="1">
+            <a:schemeClr val="accent1"/>
+          </a:lnRef>
+          <a:fillRef idx="3">
+            <a:schemeClr val="accent1"/>
+          </a:fillRef>
+          <a:effectRef idx="2">
+            <a:schemeClr val="accent1"/>
+          </a:effectRef>
+          <a:fontRef idx="minor">
+            <a:schemeClr val="lt1"/>
+          </a:fontRef>
+        </p:style>
+        <p:txBody>
+          <a:bodyPr rtlCol="0" anchor="ctr"/>
+          <a:lstStyle/>
+          <a:p>
+            <a:pPr algn="ctr"/>
+          </a:p>
+        </p:txBody>
+      </p:sp>
+      <p:sp>
+        <p:nvSpPr>
+          <p:cNvPr id="9" name="TextBox 8"/>
           <p:cNvSpPr txBox="1"/>
           <p:nvPr/>
         </p:nvSpPr>
         <p:spPr>
           <a:xfrm>
-            <a:off x="640080" y="2057400"/>
-            <a:ext cx="10972800" cy="4114800"/>
+            <a:off x="749808" y="2194560"/>
+            <a:ext cx="3163824" cy="3694176"/>
           </a:xfrm>
           <a:prstGeom prst="rect">
             <a:avLst/>
@@ -13653,231 +15630,703 @@
           <a:lstStyle/>
           <a:p>
             <a:pPr>
+              <a:spcAft>
+                <a:spcPts val="700"/>
+              </a:spcAft>
+            </a:pPr>
+            <a:r>
+              <a:rPr sz="1700" b="1" i="0">
+                <a:solidFill>
+                  <a:srgbClr val="EEF7FF"/>
+                </a:solidFill>
+                <a:latin typeface="Segoe UI"/>
+              </a:rPr>
+              <a:t>🏪  Lojas</a:t>
+            </a:r>
+          </a:p>
+          <a:p>
+            <a:pPr>
               <a:lnSpc>
-                <a:spcPct val="105000"/>
+                <a:spcPct val="104000"/>
               </a:lnSpc>
               <a:spcAft>
-                <a:spcPts val="1100"/>
-              </a:spcAft>
-            </a:pPr>
-            <a:r>
-              <a:rPr sz="1450" b="1" i="0">
+                <a:spcPts val="400"/>
+              </a:spcAft>
+            </a:pPr>
+            <a:r>
+              <a:rPr sz="1250" b="0" i="0">
                 <a:solidFill>
                   <a:srgbClr val="3AF6FF"/>
                 </a:solidFill>
                 <a:latin typeface="Segoe UI"/>
               </a:rPr>
-              <a:t>▸  </a:t>
-            </a:r>
-            <a:r>
-              <a:rPr sz="1450" b="1" i="0">
+              <a:t>• </a:t>
+            </a:r>
+            <a:r>
+              <a:rPr sz="1250" b="0" i="0">
+                <a:solidFill>
+                  <a:srgbClr val="9BB1CA"/>
+                </a:solidFill>
+                <a:latin typeface="Segoe UI"/>
+              </a:rPr>
+              <a:t>Hub de lojas (verificadas primeiro)</a:t>
+            </a:r>
+          </a:p>
+          <a:p>
+            <a:pPr>
+              <a:lnSpc>
+                <a:spcPct val="104000"/>
+              </a:lnSpc>
+              <a:spcAft>
+                <a:spcPts val="400"/>
+              </a:spcAft>
+            </a:pPr>
+            <a:r>
+              <a:rPr sz="1250" b="0" i="0">
+                <a:solidFill>
+                  <a:srgbClr val="3AF6FF"/>
+                </a:solidFill>
+                <a:latin typeface="Segoe UI"/>
+              </a:rPr>
+              <a:t>• </a:t>
+            </a:r>
+            <a:r>
+              <a:rPr sz="1250" b="0" i="0">
+                <a:solidFill>
+                  <a:srgbClr val="9BB1CA"/>
+                </a:solidFill>
+                <a:latin typeface="Segoe UI"/>
+              </a:rPr>
+              <a:t>Vitrine com banner e descrição</a:t>
+            </a:r>
+          </a:p>
+          <a:p>
+            <a:pPr>
+              <a:lnSpc>
+                <a:spcPct val="104000"/>
+              </a:lnSpc>
+              <a:spcAft>
+                <a:spcPts val="400"/>
+              </a:spcAft>
+            </a:pPr>
+            <a:r>
+              <a:rPr sz="1250" b="0" i="0">
+                <a:solidFill>
+                  <a:srgbClr val="3AF6FF"/>
+                </a:solidFill>
+                <a:latin typeface="Segoe UI"/>
+              </a:rPr>
+              <a:t>• </a:t>
+            </a:r>
+            <a:r>
+              <a:rPr sz="1250" b="0" i="0">
+                <a:solidFill>
+                  <a:srgbClr val="9BB1CA"/>
+                </a:solidFill>
+                <a:latin typeface="Segoe UI"/>
+              </a:rPr>
+              <a:t>Catálogo com itens esgotados</a:t>
+            </a:r>
+          </a:p>
+          <a:p>
+            <a:pPr>
+              <a:lnSpc>
+                <a:spcPct val="104000"/>
+              </a:lnSpc>
+              <a:spcAft>
+                <a:spcPts val="400"/>
+              </a:spcAft>
+            </a:pPr>
+            <a:r>
+              <a:rPr sz="1250" b="0" i="0">
+                <a:solidFill>
+                  <a:srgbClr val="3AF6FF"/>
+                </a:solidFill>
+                <a:latin typeface="Segoe UI"/>
+              </a:rPr>
+              <a:t>• </a:t>
+            </a:r>
+            <a:r>
+              <a:rPr sz="1250" b="0" i="0">
+                <a:solidFill>
+                  <a:srgbClr val="9BB1CA"/>
+                </a:solidFill>
+                <a:latin typeface="Segoe UI"/>
+              </a:rPr>
+              <a:t>Selo de loja verificada</a:t>
+            </a:r>
+          </a:p>
+          <a:p>
+            <a:pPr>
+              <a:lnSpc>
+                <a:spcPct val="104000"/>
+              </a:lnSpc>
+              <a:spcAft>
+                <a:spcPts val="400"/>
+              </a:spcAft>
+            </a:pPr>
+            <a:r>
+              <a:rPr sz="1250" b="0" i="0">
+                <a:solidFill>
+                  <a:srgbClr val="3AF6FF"/>
+                </a:solidFill>
+                <a:latin typeface="Segoe UI"/>
+              </a:rPr>
+              <a:t>• </a:t>
+            </a:r>
+            <a:r>
+              <a:rPr sz="1250" b="0" i="0">
+                <a:solidFill>
+                  <a:srgbClr val="9BB1CA"/>
+                </a:solidFill>
+                <a:latin typeface="Segoe UI"/>
+              </a:rPr>
+              <a:t>Solicitar verificação por documento</a:t>
+            </a:r>
+          </a:p>
+        </p:txBody>
+      </p:sp>
+      <p:sp>
+        <p:nvSpPr>
+          <p:cNvPr id="10" name="Rounded Rectangle 9"/>
+          <p:cNvSpPr/>
+          <p:nvPr/>
+        </p:nvSpPr>
+        <p:spPr>
+          <a:xfrm>
+            <a:off x="4315968" y="2011680"/>
+            <a:ext cx="3566160" cy="4023360"/>
+          </a:xfrm>
+          <a:prstGeom prst="roundRect">
+            <a:avLst/>
+          </a:prstGeom>
+          <a:solidFill>
+            <a:srgbClr val="081D3D"/>
+          </a:solidFill>
+          <a:ln w="12700">
+            <a:solidFill>
+              <a:srgbClr val="1E3A5F"/>
+            </a:solidFill>
+          </a:ln>
+          <a:effectLst/>
+        </p:spPr>
+        <p:style>
+          <a:lnRef idx="1">
+            <a:schemeClr val="accent1"/>
+          </a:lnRef>
+          <a:fillRef idx="3">
+            <a:schemeClr val="accent1"/>
+          </a:fillRef>
+          <a:effectRef idx="2">
+            <a:schemeClr val="accent1"/>
+          </a:effectRef>
+          <a:fontRef idx="minor">
+            <a:schemeClr val="lt1"/>
+          </a:fontRef>
+        </p:style>
+        <p:txBody>
+          <a:bodyPr rtlCol="0" anchor="ctr"/>
+          <a:lstStyle/>
+          <a:p>
+            <a:pPr algn="ctr"/>
+          </a:p>
+        </p:txBody>
+      </p:sp>
+      <p:sp>
+        <p:nvSpPr>
+          <p:cNvPr id="11" name="Rectangle 10"/>
+          <p:cNvSpPr/>
+          <p:nvPr/>
+        </p:nvSpPr>
+        <p:spPr>
+          <a:xfrm>
+            <a:off x="4315968" y="2011680"/>
+            <a:ext cx="3566160" cy="82296"/>
+          </a:xfrm>
+          <a:prstGeom prst="rect">
+            <a:avLst/>
+          </a:prstGeom>
+          <a:solidFill>
+            <a:srgbClr val="E04F5F"/>
+          </a:solidFill>
+          <a:ln>
+            <a:noFill/>
+          </a:ln>
+          <a:effectLst/>
+        </p:spPr>
+        <p:style>
+          <a:lnRef idx="1">
+            <a:schemeClr val="accent1"/>
+          </a:lnRef>
+          <a:fillRef idx="3">
+            <a:schemeClr val="accent1"/>
+          </a:fillRef>
+          <a:effectRef idx="2">
+            <a:schemeClr val="accent1"/>
+          </a:effectRef>
+          <a:fontRef idx="minor">
+            <a:schemeClr val="lt1"/>
+          </a:fontRef>
+        </p:style>
+        <p:txBody>
+          <a:bodyPr rtlCol="0" anchor="ctr"/>
+          <a:lstStyle/>
+          <a:p>
+            <a:pPr algn="ctr"/>
+          </a:p>
+        </p:txBody>
+      </p:sp>
+      <p:sp>
+        <p:nvSpPr>
+          <p:cNvPr id="12" name="TextBox 11"/>
+          <p:cNvSpPr txBox="1"/>
+          <p:nvPr/>
+        </p:nvSpPr>
+        <p:spPr>
+          <a:xfrm>
+            <a:off x="4517136" y="2194560"/>
+            <a:ext cx="3163824" cy="3694176"/>
+          </a:xfrm>
+          <a:prstGeom prst="rect">
+            <a:avLst/>
+          </a:prstGeom>
+          <a:noFill/>
+        </p:spPr>
+        <p:txBody>
+          <a:bodyPr wrap="square" anchor="t" lIns="73152" rIns="73152" tIns="36576" bIns="36576">
+            <a:spAutoFit/>
+          </a:bodyPr>
+          <a:lstStyle/>
+          <a:p>
+            <a:pPr>
+              <a:spcAft>
+                <a:spcPts val="700"/>
+              </a:spcAft>
+            </a:pPr>
+            <a:r>
+              <a:rPr sz="1700" b="1" i="0">
                 <a:solidFill>
                   <a:srgbClr val="EEF7FF"/>
                 </a:solidFill>
                 <a:latin typeface="Segoe UI"/>
               </a:rPr>
-              <a:t>User customizado desde o início</a:t>
-            </a:r>
-            <a:r>
-              <a:rPr sz="1450" b="0" i="0">
+              <a:t>🛡️  Moderação de conteúdo</a:t>
+            </a:r>
+          </a:p>
+          <a:p>
+            <a:pPr>
+              <a:lnSpc>
+                <a:spcPct val="104000"/>
+              </a:lnSpc>
+              <a:spcAft>
+                <a:spcPts val="400"/>
+              </a:spcAft>
+            </a:pPr>
+            <a:r>
+              <a:rPr sz="1250" b="0" i="0">
+                <a:solidFill>
+                  <a:srgbClr val="E04F5F"/>
+                </a:solidFill>
+                <a:latin typeface="Segoe UI"/>
+              </a:rPr>
+              <a:t>• </a:t>
+            </a:r>
+            <a:r>
+              <a:rPr sz="1250" b="0" i="0">
                 <a:solidFill>
                   <a:srgbClr val="9BB1CA"/>
                 </a:solidFill>
                 <a:latin typeface="Segoe UI"/>
               </a:rPr>
-              <a:t>  —  AbstractUser com is_store evita migração dolorosa depois e unifica PF/PJ num só login.</a:t>
+              <a:t>Filtro de termos proibidos no cadastro</a:t>
             </a:r>
           </a:p>
           <a:p>
             <a:pPr>
               <a:lnSpc>
-                <a:spcPct val="105000"/>
+                <a:spcPct val="104000"/>
               </a:lnSpc>
               <a:spcAft>
-                <a:spcPts val="1100"/>
-              </a:spcAft>
-            </a:pPr>
-            <a:r>
-              <a:rPr sz="1450" b="1" i="0">
-                <a:solidFill>
-                  <a:srgbClr val="3AF6FF"/>
-                </a:solidFill>
-                <a:latin typeface="Segoe UI"/>
-              </a:rPr>
-              <a:t>▸  </a:t>
-            </a:r>
-            <a:r>
-              <a:rPr sz="1450" b="1" i="0">
+                <a:spcPts val="400"/>
+              </a:spcAft>
+            </a:pPr>
+            <a:r>
+              <a:rPr sz="1250" b="0" i="0">
+                <a:solidFill>
+                  <a:srgbClr val="E04F5F"/>
+                </a:solidFill>
+                <a:latin typeface="Segoe UI"/>
+              </a:rPr>
+              <a:t>• </a:t>
+            </a:r>
+            <a:r>
+              <a:rPr sz="1250" b="0" i="0">
+                <a:solidFill>
+                  <a:srgbClr val="9BB1CA"/>
+                </a:solidFill>
+                <a:latin typeface="Segoe UI"/>
+              </a:rPr>
+              <a:t>Bloqueio de ofensa / conteúdo ilegal</a:t>
+            </a:r>
+          </a:p>
+          <a:p>
+            <a:pPr>
+              <a:lnSpc>
+                <a:spcPct val="104000"/>
+              </a:lnSpc>
+              <a:spcAft>
+                <a:spcPts val="400"/>
+              </a:spcAft>
+            </a:pPr>
+            <a:r>
+              <a:rPr sz="1250" b="0" i="0">
+                <a:solidFill>
+                  <a:srgbClr val="E04F5F"/>
+                </a:solidFill>
+                <a:latin typeface="Segoe UI"/>
+              </a:rPr>
+              <a:t>• </a:t>
+            </a:r>
+            <a:r>
+              <a:rPr sz="1250" b="0" i="0">
+                <a:solidFill>
+                  <a:srgbClr val="9BB1CA"/>
+                </a:solidFill>
+                <a:latin typeface="Segoe UI"/>
+              </a:rPr>
+              <a:t>Validação de tipo e tamanho de imagem</a:t>
+            </a:r>
+          </a:p>
+          <a:p>
+            <a:pPr>
+              <a:lnSpc>
+                <a:spcPct val="104000"/>
+              </a:lnSpc>
+              <a:spcAft>
+                <a:spcPts val="400"/>
+              </a:spcAft>
+            </a:pPr>
+            <a:r>
+              <a:rPr sz="1250" b="0" i="0">
+                <a:solidFill>
+                  <a:srgbClr val="E04F5F"/>
+                </a:solidFill>
+                <a:latin typeface="Segoe UI"/>
+              </a:rPr>
+              <a:t>• </a:t>
+            </a:r>
+            <a:r>
+              <a:rPr sz="1250" b="0" i="0">
+                <a:solidFill>
+                  <a:srgbClr val="9BB1CA"/>
+                </a:solidFill>
+                <a:latin typeface="Segoe UI"/>
+              </a:rPr>
+              <a:t>Denúncia de anúncio pelo usuário</a:t>
+            </a:r>
+          </a:p>
+          <a:p>
+            <a:pPr>
+              <a:lnSpc>
+                <a:spcPct val="104000"/>
+              </a:lnSpc>
+              <a:spcAft>
+                <a:spcPts val="400"/>
+              </a:spcAft>
+            </a:pPr>
+            <a:r>
+              <a:rPr sz="1250" b="0" i="0">
+                <a:solidFill>
+                  <a:srgbClr val="E04F5F"/>
+                </a:solidFill>
+                <a:latin typeface="Segoe UI"/>
+              </a:rPr>
+              <a:t>• </a:t>
+            </a:r>
+            <a:r>
+              <a:rPr sz="1250" b="0" i="0">
+                <a:solidFill>
+                  <a:srgbClr val="9BB1CA"/>
+                </a:solidFill>
+                <a:latin typeface="Segoe UI"/>
+              </a:rPr>
+              <a:t>Strikes: 3 → banimento automático</a:t>
+            </a:r>
+          </a:p>
+        </p:txBody>
+      </p:sp>
+      <p:sp>
+        <p:nvSpPr>
+          <p:cNvPr id="13" name="Rounded Rectangle 12"/>
+          <p:cNvSpPr/>
+          <p:nvPr/>
+        </p:nvSpPr>
+        <p:spPr>
+          <a:xfrm>
+            <a:off x="8083296" y="2011680"/>
+            <a:ext cx="3566160" cy="4023360"/>
+          </a:xfrm>
+          <a:prstGeom prst="roundRect">
+            <a:avLst/>
+          </a:prstGeom>
+          <a:solidFill>
+            <a:srgbClr val="081D3D"/>
+          </a:solidFill>
+          <a:ln w="12700">
+            <a:solidFill>
+              <a:srgbClr val="1E3A5F"/>
+            </a:solidFill>
+          </a:ln>
+          <a:effectLst/>
+        </p:spPr>
+        <p:style>
+          <a:lnRef idx="1">
+            <a:schemeClr val="accent1"/>
+          </a:lnRef>
+          <a:fillRef idx="3">
+            <a:schemeClr val="accent1"/>
+          </a:fillRef>
+          <a:effectRef idx="2">
+            <a:schemeClr val="accent1"/>
+          </a:effectRef>
+          <a:fontRef idx="minor">
+            <a:schemeClr val="lt1"/>
+          </a:fontRef>
+        </p:style>
+        <p:txBody>
+          <a:bodyPr rtlCol="0" anchor="ctr"/>
+          <a:lstStyle/>
+          <a:p>
+            <a:pPr algn="ctr"/>
+          </a:p>
+        </p:txBody>
+      </p:sp>
+      <p:sp>
+        <p:nvSpPr>
+          <p:cNvPr id="14" name="Rectangle 13"/>
+          <p:cNvSpPr/>
+          <p:nvPr/>
+        </p:nvSpPr>
+        <p:spPr>
+          <a:xfrm>
+            <a:off x="8083296" y="2011680"/>
+            <a:ext cx="3566160" cy="82296"/>
+          </a:xfrm>
+          <a:prstGeom prst="rect">
+            <a:avLst/>
+          </a:prstGeom>
+          <a:solidFill>
+            <a:srgbClr val="00FF88"/>
+          </a:solidFill>
+          <a:ln>
+            <a:noFill/>
+          </a:ln>
+          <a:effectLst/>
+        </p:spPr>
+        <p:style>
+          <a:lnRef idx="1">
+            <a:schemeClr val="accent1"/>
+          </a:lnRef>
+          <a:fillRef idx="3">
+            <a:schemeClr val="accent1"/>
+          </a:fillRef>
+          <a:effectRef idx="2">
+            <a:schemeClr val="accent1"/>
+          </a:effectRef>
+          <a:fontRef idx="minor">
+            <a:schemeClr val="lt1"/>
+          </a:fontRef>
+        </p:style>
+        <p:txBody>
+          <a:bodyPr rtlCol="0" anchor="ctr"/>
+          <a:lstStyle/>
+          <a:p>
+            <a:pPr algn="ctr"/>
+          </a:p>
+        </p:txBody>
+      </p:sp>
+      <p:sp>
+        <p:nvSpPr>
+          <p:cNvPr id="15" name="TextBox 14"/>
+          <p:cNvSpPr txBox="1"/>
+          <p:nvPr/>
+        </p:nvSpPr>
+        <p:spPr>
+          <a:xfrm>
+            <a:off x="8284464" y="2194560"/>
+            <a:ext cx="3163824" cy="3694176"/>
+          </a:xfrm>
+          <a:prstGeom prst="rect">
+            <a:avLst/>
+          </a:prstGeom>
+          <a:noFill/>
+        </p:spPr>
+        <p:txBody>
+          <a:bodyPr wrap="square" anchor="t" lIns="73152" rIns="73152" tIns="36576" bIns="36576">
+            <a:spAutoFit/>
+          </a:bodyPr>
+          <a:lstStyle/>
+          <a:p>
+            <a:pPr>
+              <a:spcAft>
+                <a:spcPts val="700"/>
+              </a:spcAft>
+            </a:pPr>
+            <a:r>
+              <a:rPr sz="1700" b="1" i="0">
                 <a:solidFill>
                   <a:srgbClr val="EEF7FF"/>
                 </a:solidFill>
                 <a:latin typeface="Segoe UI"/>
               </a:rPr>
-              <a:t>Perfis separados (Common/Store)</a:t>
-            </a:r>
-            <a:r>
-              <a:rPr sz="1450" b="0" i="0">
+              <a:t>⚙️  Painel do admin</a:t>
+            </a:r>
+          </a:p>
+          <a:p>
+            <a:pPr>
+              <a:lnSpc>
+                <a:spcPct val="104000"/>
+              </a:lnSpc>
+              <a:spcAft>
+                <a:spcPts val="400"/>
+              </a:spcAft>
+            </a:pPr>
+            <a:r>
+              <a:rPr sz="1250" b="0" i="0">
+                <a:solidFill>
+                  <a:srgbClr val="00FF88"/>
+                </a:solidFill>
+                <a:latin typeface="Segoe UI"/>
+              </a:rPr>
+              <a:t>• </a:t>
+            </a:r>
+            <a:r>
+              <a:rPr sz="1250" b="0" i="0">
                 <a:solidFill>
                   <a:srgbClr val="9BB1CA"/>
                 </a:solidFill>
                 <a:latin typeface="Segoe UI"/>
               </a:rPr>
-              <a:t>  —  cada tipo tem campos e validações próprios sem poluir o User com dezenas de colunas opcionais.</a:t>
+              <a:t>Aprovar/recusar verificações</a:t>
             </a:r>
           </a:p>
           <a:p>
             <a:pPr>
               <a:lnSpc>
-                <a:spcPct val="105000"/>
+                <a:spcPct val="104000"/>
               </a:lnSpc>
               <a:spcAft>
-                <a:spcPts val="1100"/>
-              </a:spcAft>
-            </a:pPr>
-            <a:r>
-              <a:rPr sz="1450" b="1" i="0">
-                <a:solidFill>
-                  <a:srgbClr val="3AF6FF"/>
-                </a:solidFill>
-                <a:latin typeface="Segoe UI"/>
-              </a:rPr>
-              <a:t>▸  </a:t>
-            </a:r>
-            <a:r>
-              <a:rPr sz="1450" b="1" i="0">
-                <a:solidFill>
-                  <a:srgbClr val="EEF7FF"/>
-                </a:solidFill>
-                <a:latin typeface="Segoe UI"/>
-              </a:rPr>
-              <a:t>Lógica em domains/ e não nas views</a:t>
-            </a:r>
-            <a:r>
-              <a:rPr sz="1450" b="0" i="0">
+                <a:spcPts val="400"/>
+              </a:spcAft>
+            </a:pPr>
+            <a:r>
+              <a:rPr sz="1250" b="0" i="0">
+                <a:solidFill>
+                  <a:srgbClr val="00FF88"/>
+                </a:solidFill>
+                <a:latin typeface="Segoe UI"/>
+              </a:rPr>
+              <a:t>• </a:t>
+            </a:r>
+            <a:r>
+              <a:rPr sz="1250" b="0" i="0">
                 <a:solidFill>
                   <a:srgbClr val="9BB1CA"/>
                 </a:solidFill>
                 <a:latin typeface="Segoe UI"/>
               </a:rPr>
-              <a:t>  —  views finas que delegam para módulos de domínio — mais fácil de ler, testar e dividir entre o grupo.</a:t>
+              <a:t>Excluir anúncio com motivo + strike</a:t>
             </a:r>
           </a:p>
           <a:p>
             <a:pPr>
               <a:lnSpc>
-                <a:spcPct val="105000"/>
+                <a:spcPct val="104000"/>
               </a:lnSpc>
               <a:spcAft>
-                <a:spcPts val="1100"/>
-              </a:spcAft>
-            </a:pPr>
-            <a:r>
-              <a:rPr sz="1450" b="1" i="0">
-                <a:solidFill>
-                  <a:srgbClr val="3AF6FF"/>
-                </a:solidFill>
-                <a:latin typeface="Segoe UI"/>
-              </a:rPr>
-              <a:t>▸  </a:t>
-            </a:r>
-            <a:r>
-              <a:rPr sz="1450" b="1" i="0">
-                <a:solidFill>
-                  <a:srgbClr val="EEF7FF"/>
-                </a:solidFill>
-                <a:latin typeface="Segoe UI"/>
-              </a:rPr>
-              <a:t>Snapshots em OrderItem</a:t>
-            </a:r>
-            <a:r>
-              <a:rPr sz="1450" b="0" i="0">
+                <a:spcPts val="400"/>
+              </a:spcAft>
+            </a:pPr>
+            <a:r>
+              <a:rPr sz="1250" b="0" i="0">
+                <a:solidFill>
+                  <a:srgbClr val="00FF88"/>
+                </a:solidFill>
+                <a:latin typeface="Segoe UI"/>
+              </a:rPr>
+              <a:t>• </a:t>
+            </a:r>
+            <a:r>
+              <a:rPr sz="1250" b="0" i="0">
                 <a:solidFill>
                   <a:srgbClr val="9BB1CA"/>
                 </a:solidFill>
                 <a:latin typeface="Segoe UI"/>
               </a:rPr>
-              <a:t>  —  título e preço são copiados no pedido; o histórico não muda se o anúncio for editado depois.</a:t>
+              <a:t>Banir / reativar usuários</a:t>
             </a:r>
           </a:p>
           <a:p>
             <a:pPr>
               <a:lnSpc>
-                <a:spcPct val="105000"/>
+                <a:spcPct val="104000"/>
               </a:lnSpc>
               <a:spcAft>
-                <a:spcPts val="1100"/>
-              </a:spcAft>
-            </a:pPr>
-            <a:r>
-              <a:rPr sz="1450" b="1" i="0">
-                <a:solidFill>
-                  <a:srgbClr val="3AF6FF"/>
-                </a:solidFill>
-                <a:latin typeface="Segoe UI"/>
-              </a:rPr>
-              <a:t>▸  </a:t>
-            </a:r>
-            <a:r>
-              <a:rPr sz="1450" b="1" i="0">
-                <a:solidFill>
-                  <a:srgbClr val="EEF7FF"/>
-                </a:solidFill>
-                <a:latin typeface="Segoe UI"/>
-              </a:rPr>
-              <a:t>Troca como entidades próprias</a:t>
-            </a:r>
-            <a:r>
-              <a:rPr sz="1450" b="0" i="0">
+                <a:spcPts val="400"/>
+              </a:spcAft>
+            </a:pPr>
+            <a:r>
+              <a:rPr sz="1250" b="0" i="0">
+                <a:solidFill>
+                  <a:srgbClr val="00FF88"/>
+                </a:solidFill>
+                <a:latin typeface="Segoe UI"/>
+              </a:rPr>
+              <a:t>• </a:t>
+            </a:r>
+            <a:r>
+              <a:rPr sz="1250" b="0" i="0">
                 <a:solidFill>
                   <a:srgbClr val="9BB1CA"/>
                 </a:solidFill>
                 <a:latin typeface="Segoe UI"/>
               </a:rPr>
-              <a:t>  —  TradeRequest/Proposal/Fulfillment modelam a negociação real, em vez de forçar tudo no chat.</a:t>
+              <a:t>Fila de denúncias</a:t>
             </a:r>
           </a:p>
           <a:p>
             <a:pPr>
               <a:lnSpc>
-                <a:spcPct val="105000"/>
+                <a:spcPct val="104000"/>
               </a:lnSpc>
               <a:spcAft>
-                <a:spcPts val="1100"/>
-              </a:spcAft>
-            </a:pPr>
-            <a:r>
-              <a:rPr sz="1450" b="1" i="0">
-                <a:solidFill>
-                  <a:srgbClr val="3AF6FF"/>
-                </a:solidFill>
-                <a:latin typeface="Segoe UI"/>
-              </a:rPr>
-              <a:t>▸  </a:t>
-            </a:r>
-            <a:r>
-              <a:rPr sz="1450" b="1" i="0">
-                <a:solidFill>
-                  <a:srgbClr val="EEF7FF"/>
-                </a:solidFill>
-                <a:latin typeface="Segoe UI"/>
-              </a:rPr>
-              <a:t>Pagamento via gateway + webhook</a:t>
-            </a:r>
-            <a:r>
-              <a:rPr sz="1450" b="0" i="0">
+                <a:spcPts val="400"/>
+              </a:spcAft>
+            </a:pPr>
+            <a:r>
+              <a:rPr sz="1250" b="0" i="0">
+                <a:solidFill>
+                  <a:srgbClr val="00FF88"/>
+                </a:solidFill>
+                <a:latin typeface="Segoe UI"/>
+              </a:rPr>
+              <a:t>• </a:t>
+            </a:r>
+            <a:r>
+              <a:rPr sz="1250" b="0" i="0">
                 <a:solidFill>
                   <a:srgbClr val="9BB1CA"/>
                 </a:solidFill>
                 <a:latin typeface="Segoe UI"/>
               </a:rPr>
-              <a:t>  —  o Mercado Pago confirma o pagamento de forma assíncrona, refletindo no status do pedido.</a:t>
-            </a:r>
-          </a:p>
-        </p:txBody>
-      </p:sp>
-      <p:sp>
-        <p:nvSpPr>
-          <p:cNvPr id="8" name="TextBox 7"/>
+              <a:t>Rate limit no login (anti força-bruta)</a:t>
+            </a:r>
+          </a:p>
+        </p:txBody>
+      </p:sp>
+      <p:sp>
+        <p:nvSpPr>
+          <p:cNvPr id="16" name="TextBox 15"/>
           <p:cNvSpPr txBox="1"/>
           <p:nvPr/>
         </p:nvSpPr>
@@ -13920,7 +16369,7 @@
       </p:sp>
       <p:sp>
         <p:nvSpPr>
-          <p:cNvPr id="9" name="TextBox 8"/>
+          <p:cNvPr id="17" name="TextBox 16"/>
           <p:cNvSpPr txBox="1"/>
           <p:nvPr/>
         </p:nvSpPr>
